--- a/public/lessons/year-6-maths/summer/week-22/solve-two-step-equations/teaching-powerpoint-v1.pptx
+++ b/public/lessons/year-6-maths/summer/week-22/solve-two-step-equations/teaching-powerpoint-v1.pptx
@@ -2,24 +2,24 @@
 <file path=ppt/presentation.xml><?xml version="1.0" encoding="utf-8"?>
 <p:presentation xmlns:p="http://schemas.openxmlformats.org/presentationml/2006/main">
   <p:sldMasterIdLst>
-    <p:sldMasterId xmlns:r="http://schemas.openxmlformats.org/officeDocument/2006/relationships" id="2147483648" r:id="Ra9e476b6a0484dff"/>
+    <p:sldMasterId xmlns:r="http://schemas.openxmlformats.org/officeDocument/2006/relationships" id="2147483648" r:id="R8bbcb482b4184ede"/>
   </p:sldMasterIdLst>
   <p:notesMasterIdLst>
-    <p:notesMasterId xmlns:r="http://schemas.openxmlformats.org/officeDocument/2006/relationships" r:id="R02821359b3da47d7"/>
+    <p:notesMasterId xmlns:r="http://schemas.openxmlformats.org/officeDocument/2006/relationships" r:id="Rb4c5b430259643c2"/>
   </p:notesMasterIdLst>
   <p:sldIdLst>
-    <p:sldId xmlns:r="http://schemas.openxmlformats.org/officeDocument/2006/relationships" id="256" r:id="Rc94787a94dff47b4"/>
-    <p:sldId xmlns:r="http://schemas.openxmlformats.org/officeDocument/2006/relationships" id="257" r:id="Rd01f0b6c51ce4de3"/>
-    <p:sldId xmlns:r="http://schemas.openxmlformats.org/officeDocument/2006/relationships" id="258" r:id="R2a411a1a8fbd4f82"/>
-    <p:sldId xmlns:r="http://schemas.openxmlformats.org/officeDocument/2006/relationships" id="259" r:id="Rfef9fafbf0e54b8c"/>
-    <p:sldId xmlns:r="http://schemas.openxmlformats.org/officeDocument/2006/relationships" id="260" r:id="R955ce65be65b4323"/>
-    <p:sldId xmlns:r="http://schemas.openxmlformats.org/officeDocument/2006/relationships" id="261" r:id="R124cc9b1fc5c4df1"/>
-    <p:sldId xmlns:r="http://schemas.openxmlformats.org/officeDocument/2006/relationships" id="262" r:id="Rf80512cc7bd2400e"/>
-    <p:sldId xmlns:r="http://schemas.openxmlformats.org/officeDocument/2006/relationships" id="263" r:id="R35aa1fc1b0a24214"/>
-    <p:sldId xmlns:r="http://schemas.openxmlformats.org/officeDocument/2006/relationships" id="264" r:id="Rf29fa5a8663c4ab3"/>
-    <p:sldId xmlns:r="http://schemas.openxmlformats.org/officeDocument/2006/relationships" id="265" r:id="R89f27342ad674b14"/>
-    <p:sldId xmlns:r="http://schemas.openxmlformats.org/officeDocument/2006/relationships" id="266" r:id="R7b38ed494e8a4d69"/>
-    <p:sldId xmlns:r="http://schemas.openxmlformats.org/officeDocument/2006/relationships" id="267" r:id="Rd3004abc55a348a6"/>
+    <p:sldId xmlns:r="http://schemas.openxmlformats.org/officeDocument/2006/relationships" id="256" r:id="R36929667354f4d7a"/>
+    <p:sldId xmlns:r="http://schemas.openxmlformats.org/officeDocument/2006/relationships" id="257" r:id="R8d97ffb6be4d4eec"/>
+    <p:sldId xmlns:r="http://schemas.openxmlformats.org/officeDocument/2006/relationships" id="258" r:id="Rb4043ae87e774d80"/>
+    <p:sldId xmlns:r="http://schemas.openxmlformats.org/officeDocument/2006/relationships" id="259" r:id="R4c38f8fbfe7d4635"/>
+    <p:sldId xmlns:r="http://schemas.openxmlformats.org/officeDocument/2006/relationships" id="260" r:id="R5907f1cc26724629"/>
+    <p:sldId xmlns:r="http://schemas.openxmlformats.org/officeDocument/2006/relationships" id="261" r:id="Redf5ce0de8e14811"/>
+    <p:sldId xmlns:r="http://schemas.openxmlformats.org/officeDocument/2006/relationships" id="262" r:id="R31d92bd256454ca1"/>
+    <p:sldId xmlns:r="http://schemas.openxmlformats.org/officeDocument/2006/relationships" id="263" r:id="Rf32e9e2769cd4260"/>
+    <p:sldId xmlns:r="http://schemas.openxmlformats.org/officeDocument/2006/relationships" id="264" r:id="Ra598a059236c43a7"/>
+    <p:sldId xmlns:r="http://schemas.openxmlformats.org/officeDocument/2006/relationships" id="265" r:id="R2d7105ce1f3f4f61"/>
+    <p:sldId xmlns:r="http://schemas.openxmlformats.org/officeDocument/2006/relationships" id="266" r:id="Ra8e5797aa4d2454b"/>
+    <p:sldId xmlns:r="http://schemas.openxmlformats.org/officeDocument/2006/relationships" id="267" r:id="R70f05cf1c5594b4d"/>
   </p:sldIdLst>
   <p:sldSz cx="12192000" cy="6858000"/>
   <p:notesSz cx="6858000" cy="9144000"/>
@@ -873,7 +873,7 @@
           <a:lstStyle xmlns:a="http://schemas.openxmlformats.org/drawingml/2006/main"/>
           <a:p xmlns:a="http://schemas.openxmlformats.org/drawingml/2006/main">
             <a:r>
-              <a:t>I do. Reveal the question, setup and each calculation stage one click at a time. Pupils watch before copying. Model answer: x = 11.</a:t>
+              <a:t>I do. Reveal the question, then reveal each mathematical change one click at a time. Point to the numbers and operation that changed before moving to the next line. Final answer: x = 11.</a:t>
             </a:r>
           </a:p>
         </p:txBody>
@@ -1291,7 +1291,7 @@
   </p:cSld>
   <p:clrMap bg1="lt1" tx1="dk1" bg2="lt2" tx2="dk2" accent1="accent1" accent2="accent2" accent3="accent3" accent4="accent4" accent5="accent5" accent6="accent6" hlink="hlink" folHlink="folHlink"/>
   <p:sldLayoutIdLst>
-    <p:sldLayoutId xmlns:r="http://schemas.openxmlformats.org/officeDocument/2006/relationships" id="2147483649" r:id="R2437a3ae7505401d"/>
+    <p:sldLayoutId xmlns:r="http://schemas.openxmlformats.org/officeDocument/2006/relationships" id="2147483649" r:id="Ra2ef90d2a7374a80"/>
   </p:sldLayoutIdLst>
   <p:txStyles>
     <p:titleStyle>
@@ -1842,7 +1842,7 @@
           <p:cNvPr id="12" name="">
             <a:extLst xmlns:a="http://schemas.openxmlformats.org/drawingml/2006/main">
               <a:ext uri="{FF2B5EF4-FFF2-40B4-BE49-F238E27FC236}">
-                <a16:creationId xmlns:a16="http://schemas.microsoft.com/office/drawing/2014/main" id="{FC40F0C4-D7F8-4957-8BC8-F1555A9064E6}"/>
+                <a16:creationId xmlns:a16="http://schemas.microsoft.com/office/drawing/2014/main" id="{7C00B2C1-A9E5-4084-A20E-66D383F36FE3}"/>
               </a:ext>
             </a:extLst>
           </p:cNvPr>
@@ -1874,7 +1874,7 @@
           <p:cNvPr id="2" name="">
             <a:extLst xmlns:a="http://schemas.openxmlformats.org/drawingml/2006/main">
               <a:ext uri="{FF2B5EF4-FFF2-40B4-BE49-F238E27FC236}">
-                <a16:creationId xmlns:a16="http://schemas.microsoft.com/office/drawing/2014/main" id="{9D9A3421-962C-493C-9958-1CED2BE622BD}"/>
+                <a16:creationId xmlns:a16="http://schemas.microsoft.com/office/drawing/2014/main" id="{3BD024DE-894F-4A62-B52B-70CC68704E24}"/>
               </a:ext>
             </a:extLst>
           </p:cNvPr>
@@ -1931,7 +1931,7 @@
           <p:cNvPr id="3" name="">
             <a:extLst xmlns:a="http://schemas.openxmlformats.org/drawingml/2006/main">
               <a:ext uri="{FF2B5EF4-FFF2-40B4-BE49-F238E27FC236}">
-                <a16:creationId xmlns:a16="http://schemas.microsoft.com/office/drawing/2014/main" id="{C04D9809-5957-4633-A667-7502C5477666}"/>
+                <a16:creationId xmlns:a16="http://schemas.microsoft.com/office/drawing/2014/main" id="{27F41332-0C9B-48B9-A908-E12F40E9F0E1}"/>
               </a:ext>
             </a:extLst>
           </p:cNvPr>
@@ -1965,7 +1965,7 @@
           <p:cNvPr id="4" name="">
             <a:extLst xmlns:a="http://schemas.openxmlformats.org/drawingml/2006/main">
               <a:ext uri="{FF2B5EF4-FFF2-40B4-BE49-F238E27FC236}">
-                <a16:creationId xmlns:a16="http://schemas.microsoft.com/office/drawing/2014/main" id="{087C833F-AC34-4449-A68C-059DCCDFC26D}"/>
+                <a16:creationId xmlns:a16="http://schemas.microsoft.com/office/drawing/2014/main" id="{B3659610-42D2-4C47-A265-1F7938DCBD9F}"/>
               </a:ext>
             </a:extLst>
           </p:cNvPr>
@@ -2022,7 +2022,7 @@
           <p:cNvPr id="5" name="">
             <a:extLst xmlns:a="http://schemas.openxmlformats.org/drawingml/2006/main">
               <a:ext uri="{FF2B5EF4-FFF2-40B4-BE49-F238E27FC236}">
-                <a16:creationId xmlns:a16="http://schemas.microsoft.com/office/drawing/2014/main" id="{E6F4840E-61E7-46D3-840F-9502CEFE7404}"/>
+                <a16:creationId xmlns:a16="http://schemas.microsoft.com/office/drawing/2014/main" id="{AB436714-12C1-46CB-8501-5C468B0BEC91}"/>
               </a:ext>
             </a:extLst>
           </p:cNvPr>
@@ -2079,7 +2079,7 @@
           <p:cNvPr id="6" name="">
             <a:extLst xmlns:a="http://schemas.openxmlformats.org/drawingml/2006/main">
               <a:ext uri="{FF2B5EF4-FFF2-40B4-BE49-F238E27FC236}">
-                <a16:creationId xmlns:a16="http://schemas.microsoft.com/office/drawing/2014/main" id="{FB5FCCAE-599A-433C-A028-58D46FB9972A}"/>
+                <a16:creationId xmlns:a16="http://schemas.microsoft.com/office/drawing/2014/main" id="{C29506A1-118F-441E-BA76-78D20B061A42}"/>
               </a:ext>
             </a:extLst>
           </p:cNvPr>
@@ -2113,7 +2113,7 @@
           <p:cNvPr id="7" name="">
             <a:extLst xmlns:a="http://schemas.openxmlformats.org/drawingml/2006/main">
               <a:ext uri="{FF2B5EF4-FFF2-40B4-BE49-F238E27FC236}">
-                <a16:creationId xmlns:a16="http://schemas.microsoft.com/office/drawing/2014/main" id="{81664E9A-C05B-4561-A7AE-452736884B5D}"/>
+                <a16:creationId xmlns:a16="http://schemas.microsoft.com/office/drawing/2014/main" id="{63FDBA47-BD3A-40DF-9DB8-56D49CE6DA7A}"/>
               </a:ext>
             </a:extLst>
           </p:cNvPr>
@@ -2170,7 +2170,7 @@
           <p:cNvPr id="8" name="">
             <a:extLst xmlns:a="http://schemas.openxmlformats.org/drawingml/2006/main">
               <a:ext uri="{FF2B5EF4-FFF2-40B4-BE49-F238E27FC236}">
-                <a16:creationId xmlns:a16="http://schemas.microsoft.com/office/drawing/2014/main" id="{4AD0986F-3615-40EA-B6E8-4257A212D16D}"/>
+                <a16:creationId xmlns:a16="http://schemas.microsoft.com/office/drawing/2014/main" id="{34D19A11-EE4A-4BF0-80FC-AFF925621849}"/>
               </a:ext>
             </a:extLst>
           </p:cNvPr>
@@ -2227,7 +2227,7 @@
           <p:cNvPr id="9" name="">
             <a:extLst xmlns:a="http://schemas.openxmlformats.org/drawingml/2006/main">
               <a:ext uri="{FF2B5EF4-FFF2-40B4-BE49-F238E27FC236}">
-                <a16:creationId xmlns:a16="http://schemas.microsoft.com/office/drawing/2014/main" id="{B6617F34-CD03-4222-A676-41A9902889A5}"/>
+                <a16:creationId xmlns:a16="http://schemas.microsoft.com/office/drawing/2014/main" id="{66B1D3DF-D53E-4810-9036-BABC6D563E73}"/>
               </a:ext>
             </a:extLst>
           </p:cNvPr>
@@ -2284,7 +2284,7 @@
           <p:cNvPr id="10" name="">
             <a:extLst xmlns:a="http://schemas.openxmlformats.org/drawingml/2006/main">
               <a:ext uri="{FF2B5EF4-FFF2-40B4-BE49-F238E27FC236}">
-                <a16:creationId xmlns:a16="http://schemas.microsoft.com/office/drawing/2014/main" id="{47F39506-61BE-4EF5-AE53-9504D16A51D8}"/>
+                <a16:creationId xmlns:a16="http://schemas.microsoft.com/office/drawing/2014/main" id="{67C8DEE9-8FA6-4FE3-8767-507F9C06DBF5}"/>
               </a:ext>
             </a:extLst>
           </p:cNvPr>
@@ -2341,7 +2341,7 @@
           <p:cNvPr id="11" name="">
             <a:extLst xmlns:a="http://schemas.openxmlformats.org/drawingml/2006/main">
               <a:ext uri="{FF2B5EF4-FFF2-40B4-BE49-F238E27FC236}">
-                <a16:creationId xmlns:a16="http://schemas.microsoft.com/office/drawing/2014/main" id="{15BE398A-1FE8-4A19-867F-9E003F6294AE}"/>
+                <a16:creationId xmlns:a16="http://schemas.microsoft.com/office/drawing/2014/main" id="{857D5A22-AA4A-477E-97AA-D4E82B78A53A}"/>
               </a:ext>
             </a:extLst>
           </p:cNvPr>
@@ -2396,7 +2396,7 @@
     </p:spTree>
     <p:extLst>
       <p:ext uri="{BB962C8B-B14F-4D97-AF65-F5344CB8AC3E}">
-        <p14:creationId xmlns:p14="http://schemas.microsoft.com/office/powerpoint/2010/main" val="408125686"/>
+        <p14:creationId xmlns:p14="http://schemas.microsoft.com/office/powerpoint/2010/main" val="890747928"/>
       </p:ext>
     </p:extLst>
   </p:cSld>
@@ -2427,7 +2427,7 @@
           <p:cNvPr id="14" name="">
             <a:extLst xmlns:a="http://schemas.openxmlformats.org/drawingml/2006/main">
               <a:ext uri="{FF2B5EF4-FFF2-40B4-BE49-F238E27FC236}">
-                <a16:creationId xmlns:a16="http://schemas.microsoft.com/office/drawing/2014/main" id="{261B0DB2-8883-4F46-8881-7747A2A70AA5}"/>
+                <a16:creationId xmlns:a16="http://schemas.microsoft.com/office/drawing/2014/main" id="{D101DC6D-5FA2-4F42-8D06-811BADDC16CB}"/>
               </a:ext>
             </a:extLst>
           </p:cNvPr>
@@ -2459,7 +2459,7 @@
           <p:cNvPr id="2" name="">
             <a:extLst xmlns:a="http://schemas.openxmlformats.org/drawingml/2006/main">
               <a:ext uri="{FF2B5EF4-FFF2-40B4-BE49-F238E27FC236}">
-                <a16:creationId xmlns:a16="http://schemas.microsoft.com/office/drawing/2014/main" id="{0EF03400-3E9C-43DF-B9C8-15EFDC8A8008}"/>
+                <a16:creationId xmlns:a16="http://schemas.microsoft.com/office/drawing/2014/main" id="{C73FA5D0-DFEB-4AC4-95C1-5E014383EF7B}"/>
               </a:ext>
             </a:extLst>
           </p:cNvPr>
@@ -2516,7 +2516,7 @@
           <p:cNvPr id="3" name="">
             <a:extLst xmlns:a="http://schemas.openxmlformats.org/drawingml/2006/main">
               <a:ext uri="{FF2B5EF4-FFF2-40B4-BE49-F238E27FC236}">
-                <a16:creationId xmlns:a16="http://schemas.microsoft.com/office/drawing/2014/main" id="{99B50947-7547-4908-BBB5-DDC1610CD7DB}"/>
+                <a16:creationId xmlns:a16="http://schemas.microsoft.com/office/drawing/2014/main" id="{D11985BB-0AA1-4178-AB84-3DB0A0B427B8}"/>
               </a:ext>
             </a:extLst>
           </p:cNvPr>
@@ -2548,7 +2548,7 @@
           <p:cNvPr id="4" name="">
             <a:extLst xmlns:a="http://schemas.openxmlformats.org/drawingml/2006/main">
               <a:ext uri="{FF2B5EF4-FFF2-40B4-BE49-F238E27FC236}">
-                <a16:creationId xmlns:a16="http://schemas.microsoft.com/office/drawing/2014/main" id="{023EC441-965B-4EC5-ABA5-FE6565F09A0C}"/>
+                <a16:creationId xmlns:a16="http://schemas.microsoft.com/office/drawing/2014/main" id="{A745BC66-5E53-4CA0-8BEA-76AAD9B6C2E5}"/>
               </a:ext>
             </a:extLst>
           </p:cNvPr>
@@ -2605,7 +2605,7 @@
           <p:cNvPr id="5" name="">
             <a:extLst xmlns:a="http://schemas.openxmlformats.org/drawingml/2006/main">
               <a:ext uri="{FF2B5EF4-FFF2-40B4-BE49-F238E27FC236}">
-                <a16:creationId xmlns:a16="http://schemas.microsoft.com/office/drawing/2014/main" id="{F94705D7-832C-4FD9-8EC0-279DE27185FD}"/>
+                <a16:creationId xmlns:a16="http://schemas.microsoft.com/office/drawing/2014/main" id="{BF5D28A9-3CED-4146-A505-EA637AA684F9}"/>
               </a:ext>
             </a:extLst>
           </p:cNvPr>
@@ -2662,7 +2662,7 @@
           <p:cNvPr id="6" name="">
             <a:extLst xmlns:a="http://schemas.openxmlformats.org/drawingml/2006/main">
               <a:ext uri="{FF2B5EF4-FFF2-40B4-BE49-F238E27FC236}">
-                <a16:creationId xmlns:a16="http://schemas.microsoft.com/office/drawing/2014/main" id="{3A3314CD-F641-4C47-8D05-78BF630058D4}"/>
+                <a16:creationId xmlns:a16="http://schemas.microsoft.com/office/drawing/2014/main" id="{7AEB0B00-B7FC-42D9-8921-73EBB990627D}"/>
               </a:ext>
             </a:extLst>
           </p:cNvPr>
@@ -2719,7 +2719,7 @@
           <p:cNvPr id="7" name="">
             <a:extLst xmlns:a="http://schemas.openxmlformats.org/drawingml/2006/main">
               <a:ext uri="{FF2B5EF4-FFF2-40B4-BE49-F238E27FC236}">
-                <a16:creationId xmlns:a16="http://schemas.microsoft.com/office/drawing/2014/main" id="{E7423907-50BF-428F-AD4E-57C9C8AB3807}"/>
+                <a16:creationId xmlns:a16="http://schemas.microsoft.com/office/drawing/2014/main" id="{C566D2ED-22CE-477F-993C-875500894B90}"/>
               </a:ext>
             </a:extLst>
           </p:cNvPr>
@@ -2751,7 +2751,7 @@
           <p:cNvPr id="8" name="">
             <a:extLst xmlns:a="http://schemas.openxmlformats.org/drawingml/2006/main">
               <a:ext uri="{FF2B5EF4-FFF2-40B4-BE49-F238E27FC236}">
-                <a16:creationId xmlns:a16="http://schemas.microsoft.com/office/drawing/2014/main" id="{E47034BF-53E2-4EA3-899C-E7B300650B46}"/>
+                <a16:creationId xmlns:a16="http://schemas.microsoft.com/office/drawing/2014/main" id="{E99424A7-50C3-4A21-898B-EC740A005432}"/>
               </a:ext>
             </a:extLst>
           </p:cNvPr>
@@ -2808,7 +2808,7 @@
           <p:cNvPr id="9" name="">
             <a:extLst xmlns:a="http://schemas.openxmlformats.org/drawingml/2006/main">
               <a:ext uri="{FF2B5EF4-FFF2-40B4-BE49-F238E27FC236}">
-                <a16:creationId xmlns:a16="http://schemas.microsoft.com/office/drawing/2014/main" id="{486B4E24-72EC-4361-A3E2-9725EADC1003}"/>
+                <a16:creationId xmlns:a16="http://schemas.microsoft.com/office/drawing/2014/main" id="{C801C963-F8D8-4563-96EB-2A661BA9486F}"/>
               </a:ext>
             </a:extLst>
           </p:cNvPr>
@@ -2865,7 +2865,7 @@
           <p:cNvPr id="10" name="">
             <a:extLst xmlns:a="http://schemas.openxmlformats.org/drawingml/2006/main">
               <a:ext uri="{FF2B5EF4-FFF2-40B4-BE49-F238E27FC236}">
-                <a16:creationId xmlns:a16="http://schemas.microsoft.com/office/drawing/2014/main" id="{9B956326-522D-41F4-8A4A-B8609B643F76}"/>
+                <a16:creationId xmlns:a16="http://schemas.microsoft.com/office/drawing/2014/main" id="{0F13EA9B-6921-4ECD-B025-2867109B978F}"/>
               </a:ext>
             </a:extLst>
           </p:cNvPr>
@@ -2922,7 +2922,7 @@
           <p:cNvPr id="11" name="">
             <a:extLst xmlns:a="http://schemas.openxmlformats.org/drawingml/2006/main">
               <a:ext uri="{FF2B5EF4-FFF2-40B4-BE49-F238E27FC236}">
-                <a16:creationId xmlns:a16="http://schemas.microsoft.com/office/drawing/2014/main" id="{5065A15E-FA9E-4BDE-BF57-3C19C1ADD6B2}"/>
+                <a16:creationId xmlns:a16="http://schemas.microsoft.com/office/drawing/2014/main" id="{FCC2767B-5150-4F3E-B7AB-AC57D211F4EC}"/>
               </a:ext>
             </a:extLst>
           </p:cNvPr>
@@ -2979,7 +2979,7 @@
           <p:cNvPr id="12" name="">
             <a:extLst xmlns:a="http://schemas.openxmlformats.org/drawingml/2006/main">
               <a:ext uri="{FF2B5EF4-FFF2-40B4-BE49-F238E27FC236}">
-                <a16:creationId xmlns:a16="http://schemas.microsoft.com/office/drawing/2014/main" id="{8394D3FF-46CB-4564-AF10-D1D11467BA2B}"/>
+                <a16:creationId xmlns:a16="http://schemas.microsoft.com/office/drawing/2014/main" id="{7D8A4019-6128-41B6-A757-56359AA8D7D6}"/>
               </a:ext>
             </a:extLst>
           </p:cNvPr>
@@ -3036,7 +3036,7 @@
           <p:cNvPr id="13" name="">
             <a:extLst xmlns:a="http://schemas.openxmlformats.org/drawingml/2006/main">
               <a:ext uri="{FF2B5EF4-FFF2-40B4-BE49-F238E27FC236}">
-                <a16:creationId xmlns:a16="http://schemas.microsoft.com/office/drawing/2014/main" id="{2C0B1E12-02AE-41A8-923A-DB5811A85E31}"/>
+                <a16:creationId xmlns:a16="http://schemas.microsoft.com/office/drawing/2014/main" id="{A9A2D7FD-0D2B-48BC-A242-BEDC9801E70A}"/>
               </a:ext>
             </a:extLst>
           </p:cNvPr>
@@ -3091,7 +3091,7 @@
     </p:spTree>
     <p:extLst>
       <p:ext uri="{BB962C8B-B14F-4D97-AF65-F5344CB8AC3E}">
-        <p14:creationId xmlns:p14="http://schemas.microsoft.com/office/powerpoint/2010/main" val="1576168497"/>
+        <p14:creationId xmlns:p14="http://schemas.microsoft.com/office/powerpoint/2010/main" val="1704286728"/>
       </p:ext>
     </p:extLst>
   </p:cSld>
@@ -3292,7 +3292,7 @@
           <p:cNvPr id="19" name="">
             <a:extLst xmlns:a="http://schemas.openxmlformats.org/drawingml/2006/main">
               <a:ext uri="{FF2B5EF4-FFF2-40B4-BE49-F238E27FC236}">
-                <a16:creationId xmlns:a16="http://schemas.microsoft.com/office/drawing/2014/main" id="{BFD41C63-3C3E-4D76-BBB3-7F3FB63260D6}"/>
+                <a16:creationId xmlns:a16="http://schemas.microsoft.com/office/drawing/2014/main" id="{5549F372-1F3D-4873-B525-A29CC80A4D42}"/>
               </a:ext>
             </a:extLst>
           </p:cNvPr>
@@ -3324,7 +3324,7 @@
           <p:cNvPr id="2" name="">
             <a:extLst xmlns:a="http://schemas.openxmlformats.org/drawingml/2006/main">
               <a:ext uri="{FF2B5EF4-FFF2-40B4-BE49-F238E27FC236}">
-                <a16:creationId xmlns:a16="http://schemas.microsoft.com/office/drawing/2014/main" id="{F701A1F8-AC80-40A0-A34C-23280E022330}"/>
+                <a16:creationId xmlns:a16="http://schemas.microsoft.com/office/drawing/2014/main" id="{8A100296-5777-4F12-BA2A-397E668126E8}"/>
               </a:ext>
             </a:extLst>
           </p:cNvPr>
@@ -3381,7 +3381,7 @@
           <p:cNvPr id="3" name="">
             <a:extLst xmlns:a="http://schemas.openxmlformats.org/drawingml/2006/main">
               <a:ext uri="{FF2B5EF4-FFF2-40B4-BE49-F238E27FC236}">
-                <a16:creationId xmlns:a16="http://schemas.microsoft.com/office/drawing/2014/main" id="{C273F6A3-5C39-496B-80C3-085800F21F05}"/>
+                <a16:creationId xmlns:a16="http://schemas.microsoft.com/office/drawing/2014/main" id="{4CD93481-94AF-432F-AE79-BF44DEA0D625}"/>
               </a:ext>
             </a:extLst>
           </p:cNvPr>
@@ -3413,7 +3413,7 @@
           <p:cNvPr id="4" name="">
             <a:extLst xmlns:a="http://schemas.openxmlformats.org/drawingml/2006/main">
               <a:ext uri="{FF2B5EF4-FFF2-40B4-BE49-F238E27FC236}">
-                <a16:creationId xmlns:a16="http://schemas.microsoft.com/office/drawing/2014/main" id="{989AFCC4-A6A2-4D42-A148-8A955F31BC7C}"/>
+                <a16:creationId xmlns:a16="http://schemas.microsoft.com/office/drawing/2014/main" id="{3B8D9FD1-1676-4174-8FEE-F52932B75E40}"/>
               </a:ext>
             </a:extLst>
           </p:cNvPr>
@@ -3470,7 +3470,7 @@
           <p:cNvPr id="5" name="">
             <a:extLst xmlns:a="http://schemas.openxmlformats.org/drawingml/2006/main">
               <a:ext uri="{FF2B5EF4-FFF2-40B4-BE49-F238E27FC236}">
-                <a16:creationId xmlns:a16="http://schemas.microsoft.com/office/drawing/2014/main" id="{2589CE82-4BE4-46FC-85E2-9533C4DC4980}"/>
+                <a16:creationId xmlns:a16="http://schemas.microsoft.com/office/drawing/2014/main" id="{55CB32C1-B9BA-497D-9085-B224AF1AE5D0}"/>
               </a:ext>
             </a:extLst>
           </p:cNvPr>
@@ -3527,7 +3527,7 @@
           <p:cNvPr id="6" name="">
             <a:extLst xmlns:a="http://schemas.openxmlformats.org/drawingml/2006/main">
               <a:ext uri="{FF2B5EF4-FFF2-40B4-BE49-F238E27FC236}">
-                <a16:creationId xmlns:a16="http://schemas.microsoft.com/office/drawing/2014/main" id="{52616941-93D9-454E-BE41-7359C3EE3817}"/>
+                <a16:creationId xmlns:a16="http://schemas.microsoft.com/office/drawing/2014/main" id="{9C3B5638-0EAE-4E0B-BB67-F60490DF9960}"/>
               </a:ext>
             </a:extLst>
           </p:cNvPr>
@@ -3584,7 +3584,7 @@
           <p:cNvPr id="7" name="">
             <a:extLst xmlns:a="http://schemas.openxmlformats.org/drawingml/2006/main">
               <a:ext uri="{FF2B5EF4-FFF2-40B4-BE49-F238E27FC236}">
-                <a16:creationId xmlns:a16="http://schemas.microsoft.com/office/drawing/2014/main" id="{C2FA5A3E-FEE5-47B5-B38D-0C430B4DC17A}"/>
+                <a16:creationId xmlns:a16="http://schemas.microsoft.com/office/drawing/2014/main" id="{EF6F5272-CEDD-4B31-AEB8-F596992220F4}"/>
               </a:ext>
             </a:extLst>
           </p:cNvPr>
@@ -3616,7 +3616,7 @@
           <p:cNvPr id="8" name="">
             <a:extLst xmlns:a="http://schemas.openxmlformats.org/drawingml/2006/main">
               <a:ext uri="{FF2B5EF4-FFF2-40B4-BE49-F238E27FC236}">
-                <a16:creationId xmlns:a16="http://schemas.microsoft.com/office/drawing/2014/main" id="{994385EA-04E8-4904-B146-FE3B9644978D}"/>
+                <a16:creationId xmlns:a16="http://schemas.microsoft.com/office/drawing/2014/main" id="{439B1048-137B-4F0F-8E00-DE3D68ECBD7B}"/>
               </a:ext>
             </a:extLst>
           </p:cNvPr>
@@ -3673,7 +3673,7 @@
           <p:cNvPr id="9" name="">
             <a:extLst xmlns:a="http://schemas.openxmlformats.org/drawingml/2006/main">
               <a:ext uri="{FF2B5EF4-FFF2-40B4-BE49-F238E27FC236}">
-                <a16:creationId xmlns:a16="http://schemas.microsoft.com/office/drawing/2014/main" id="{59DE4341-A186-4B1A-968E-38B8192EE6D5}"/>
+                <a16:creationId xmlns:a16="http://schemas.microsoft.com/office/drawing/2014/main" id="{65666A7E-5A22-4AC1-9E9C-55DD7C9A8215}"/>
               </a:ext>
             </a:extLst>
           </p:cNvPr>
@@ -3730,7 +3730,7 @@
           <p:cNvPr id="10" name="">
             <a:extLst xmlns:a="http://schemas.openxmlformats.org/drawingml/2006/main">
               <a:ext uri="{FF2B5EF4-FFF2-40B4-BE49-F238E27FC236}">
-                <a16:creationId xmlns:a16="http://schemas.microsoft.com/office/drawing/2014/main" id="{6D216190-07F1-4B23-8B8A-983429E42986}"/>
+                <a16:creationId xmlns:a16="http://schemas.microsoft.com/office/drawing/2014/main" id="{2E642DA1-373E-44C6-8ED1-B8ED1A5D0378}"/>
               </a:ext>
             </a:extLst>
           </p:cNvPr>
@@ -3787,7 +3787,7 @@
           <p:cNvPr id="11" name="">
             <a:extLst xmlns:a="http://schemas.openxmlformats.org/drawingml/2006/main">
               <a:ext uri="{FF2B5EF4-FFF2-40B4-BE49-F238E27FC236}">
-                <a16:creationId xmlns:a16="http://schemas.microsoft.com/office/drawing/2014/main" id="{D9E97A90-FE65-4BB3-B5FC-6483A1117AF1}"/>
+                <a16:creationId xmlns:a16="http://schemas.microsoft.com/office/drawing/2014/main" id="{2FC34D15-E3B7-4B5D-B73F-C1697311B95E}"/>
               </a:ext>
             </a:extLst>
           </p:cNvPr>
@@ -3821,7 +3821,7 @@
           <p:cNvPr id="12" name="">
             <a:extLst xmlns:a="http://schemas.openxmlformats.org/drawingml/2006/main">
               <a:ext uri="{FF2B5EF4-FFF2-40B4-BE49-F238E27FC236}">
-                <a16:creationId xmlns:a16="http://schemas.microsoft.com/office/drawing/2014/main" id="{0B2380A2-9242-44A5-9022-C8E8F2F0F4C5}"/>
+                <a16:creationId xmlns:a16="http://schemas.microsoft.com/office/drawing/2014/main" id="{FF245159-692E-44CA-B244-1368A2EF2F00}"/>
               </a:ext>
             </a:extLst>
           </p:cNvPr>
@@ -3878,7 +3878,7 @@
           <p:cNvPr id="13" name="">
             <a:extLst xmlns:a="http://schemas.openxmlformats.org/drawingml/2006/main">
               <a:ext uri="{FF2B5EF4-FFF2-40B4-BE49-F238E27FC236}">
-                <a16:creationId xmlns:a16="http://schemas.microsoft.com/office/drawing/2014/main" id="{7BEE24B0-290B-4F1C-ADBD-05DEA8B04EB2}"/>
+                <a16:creationId xmlns:a16="http://schemas.microsoft.com/office/drawing/2014/main" id="{41167E3D-E141-4332-8FE0-25FC6F9194D6}"/>
               </a:ext>
             </a:extLst>
           </p:cNvPr>
@@ -3935,7 +3935,7 @@
           <p:cNvPr id="14" name="">
             <a:extLst xmlns:a="http://schemas.openxmlformats.org/drawingml/2006/main">
               <a:ext uri="{FF2B5EF4-FFF2-40B4-BE49-F238E27FC236}">
-                <a16:creationId xmlns:a16="http://schemas.microsoft.com/office/drawing/2014/main" id="{EB8E7107-AEBC-4DB4-90A4-C6D0A9C58DCB}"/>
+                <a16:creationId xmlns:a16="http://schemas.microsoft.com/office/drawing/2014/main" id="{FFD054B5-915D-41D1-90DC-47F64873AFC0}"/>
               </a:ext>
             </a:extLst>
           </p:cNvPr>
@@ -3992,7 +3992,7 @@
           <p:cNvPr id="15" name="">
             <a:extLst xmlns:a="http://schemas.openxmlformats.org/drawingml/2006/main">
               <a:ext uri="{FF2B5EF4-FFF2-40B4-BE49-F238E27FC236}">
-                <a16:creationId xmlns:a16="http://schemas.microsoft.com/office/drawing/2014/main" id="{CC962B45-1A87-4F71-A47A-13437FDDF476}"/>
+                <a16:creationId xmlns:a16="http://schemas.microsoft.com/office/drawing/2014/main" id="{CD58A636-7C1C-40C3-8011-3A47ACC97CAF}"/>
               </a:ext>
             </a:extLst>
           </p:cNvPr>
@@ -4026,7 +4026,7 @@
           <p:cNvPr id="16" name="">
             <a:extLst xmlns:a="http://schemas.openxmlformats.org/drawingml/2006/main">
               <a:ext uri="{FF2B5EF4-FFF2-40B4-BE49-F238E27FC236}">
-                <a16:creationId xmlns:a16="http://schemas.microsoft.com/office/drawing/2014/main" id="{394B55F4-71E7-4521-8700-26C6E53EF63D}"/>
+                <a16:creationId xmlns:a16="http://schemas.microsoft.com/office/drawing/2014/main" id="{91540E09-D0C5-4008-A549-A0ADF07D17DA}"/>
               </a:ext>
             </a:extLst>
           </p:cNvPr>
@@ -4083,7 +4083,7 @@
           <p:cNvPr id="17" name="">
             <a:extLst xmlns:a="http://schemas.openxmlformats.org/drawingml/2006/main">
               <a:ext uri="{FF2B5EF4-FFF2-40B4-BE49-F238E27FC236}">
-                <a16:creationId xmlns:a16="http://schemas.microsoft.com/office/drawing/2014/main" id="{78A911A1-94EB-413B-BCF7-0063E76D05A8}"/>
+                <a16:creationId xmlns:a16="http://schemas.microsoft.com/office/drawing/2014/main" id="{CF9CD49D-8991-444B-A9AD-CFFA9D37EA52}"/>
               </a:ext>
             </a:extLst>
           </p:cNvPr>
@@ -4140,7 +4140,7 @@
           <p:cNvPr id="18" name="">
             <a:extLst xmlns:a="http://schemas.openxmlformats.org/drawingml/2006/main">
               <a:ext uri="{FF2B5EF4-FFF2-40B4-BE49-F238E27FC236}">
-                <a16:creationId xmlns:a16="http://schemas.microsoft.com/office/drawing/2014/main" id="{2751EE46-5A24-4147-ADED-4CA5864980AE}"/>
+                <a16:creationId xmlns:a16="http://schemas.microsoft.com/office/drawing/2014/main" id="{BB47D2CB-9749-42E8-B9AE-47580C5867B1}"/>
               </a:ext>
             </a:extLst>
           </p:cNvPr>
@@ -4195,7 +4195,7 @@
     </p:spTree>
     <p:extLst>
       <p:ext uri="{BB962C8B-B14F-4D97-AF65-F5344CB8AC3E}">
-        <p14:creationId xmlns:p14="http://schemas.microsoft.com/office/powerpoint/2010/main" val="8420139"/>
+        <p14:creationId xmlns:p14="http://schemas.microsoft.com/office/powerpoint/2010/main" val="1887349400"/>
       </p:ext>
     </p:extLst>
   </p:cSld>
@@ -4350,7 +4350,7 @@
           <p:cNvPr id="23" name="">
             <a:extLst xmlns:a="http://schemas.openxmlformats.org/drawingml/2006/main">
               <a:ext uri="{FF2B5EF4-FFF2-40B4-BE49-F238E27FC236}">
-                <a16:creationId xmlns:a16="http://schemas.microsoft.com/office/drawing/2014/main" id="{8A47A1FA-93CA-468E-A1B6-277CF260686A}"/>
+                <a16:creationId xmlns:a16="http://schemas.microsoft.com/office/drawing/2014/main" id="{33C717DF-D7C9-4606-A09E-DEC94E4AA428}"/>
               </a:ext>
             </a:extLst>
           </p:cNvPr>
@@ -4382,7 +4382,7 @@
           <p:cNvPr id="2" name="">
             <a:extLst xmlns:a="http://schemas.openxmlformats.org/drawingml/2006/main">
               <a:ext uri="{FF2B5EF4-FFF2-40B4-BE49-F238E27FC236}">
-                <a16:creationId xmlns:a16="http://schemas.microsoft.com/office/drawing/2014/main" id="{651B069C-8569-484C-B8BB-F5EC391D8BA7}"/>
+                <a16:creationId xmlns:a16="http://schemas.microsoft.com/office/drawing/2014/main" id="{A3CAAC67-48A9-44CB-81E2-F6E3EC97055D}"/>
               </a:ext>
             </a:extLst>
           </p:cNvPr>
@@ -4439,7 +4439,7 @@
           <p:cNvPr id="3" name="">
             <a:extLst xmlns:a="http://schemas.openxmlformats.org/drawingml/2006/main">
               <a:ext uri="{FF2B5EF4-FFF2-40B4-BE49-F238E27FC236}">
-                <a16:creationId xmlns:a16="http://schemas.microsoft.com/office/drawing/2014/main" id="{A9C16F06-8C0B-402B-B666-14DC738F4408}"/>
+                <a16:creationId xmlns:a16="http://schemas.microsoft.com/office/drawing/2014/main" id="{397B3B5B-0748-4D4D-8D4D-15E3154BC5CA}"/>
               </a:ext>
             </a:extLst>
           </p:cNvPr>
@@ -4471,7 +4471,7 @@
           <p:cNvPr id="4" name="">
             <a:extLst xmlns:a="http://schemas.openxmlformats.org/drawingml/2006/main">
               <a:ext uri="{FF2B5EF4-FFF2-40B4-BE49-F238E27FC236}">
-                <a16:creationId xmlns:a16="http://schemas.microsoft.com/office/drawing/2014/main" id="{79FE2441-21A7-4AA9-B8D4-F6A5D4362F31}"/>
+                <a16:creationId xmlns:a16="http://schemas.microsoft.com/office/drawing/2014/main" id="{7F38AD2F-6754-4E9B-A88B-70F06BDA9478}"/>
               </a:ext>
             </a:extLst>
           </p:cNvPr>
@@ -4528,7 +4528,7 @@
           <p:cNvPr id="5" name="">
             <a:extLst xmlns:a="http://schemas.openxmlformats.org/drawingml/2006/main">
               <a:ext uri="{FF2B5EF4-FFF2-40B4-BE49-F238E27FC236}">
-                <a16:creationId xmlns:a16="http://schemas.microsoft.com/office/drawing/2014/main" id="{68BD62F3-3644-4593-B26B-E9CCF2E59182}"/>
+                <a16:creationId xmlns:a16="http://schemas.microsoft.com/office/drawing/2014/main" id="{A98DCD12-8C06-451B-8DBD-37D7852E1897}"/>
               </a:ext>
             </a:extLst>
           </p:cNvPr>
@@ -4585,7 +4585,7 @@
           <p:cNvPr id="6" name="">
             <a:extLst xmlns:a="http://schemas.openxmlformats.org/drawingml/2006/main">
               <a:ext uri="{FF2B5EF4-FFF2-40B4-BE49-F238E27FC236}">
-                <a16:creationId xmlns:a16="http://schemas.microsoft.com/office/drawing/2014/main" id="{FED1AA0D-71B3-45BF-95C8-81DBBC85CA9E}"/>
+                <a16:creationId xmlns:a16="http://schemas.microsoft.com/office/drawing/2014/main" id="{BB2F5F03-92BA-45EB-A690-60798A16F228}"/>
               </a:ext>
             </a:extLst>
           </p:cNvPr>
@@ -4642,7 +4642,7 @@
           <p:cNvPr id="7" name="">
             <a:extLst xmlns:a="http://schemas.openxmlformats.org/drawingml/2006/main">
               <a:ext uri="{FF2B5EF4-FFF2-40B4-BE49-F238E27FC236}">
-                <a16:creationId xmlns:a16="http://schemas.microsoft.com/office/drawing/2014/main" id="{6D7A11FA-B4D8-44E8-B21C-1BA59E18DA70}"/>
+                <a16:creationId xmlns:a16="http://schemas.microsoft.com/office/drawing/2014/main" id="{48D31490-F6D6-446A-8542-FBD8A8B935AB}"/>
               </a:ext>
             </a:extLst>
           </p:cNvPr>
@@ -4674,7 +4674,7 @@
           <p:cNvPr id="8" name="">
             <a:extLst xmlns:a="http://schemas.openxmlformats.org/drawingml/2006/main">
               <a:ext uri="{FF2B5EF4-FFF2-40B4-BE49-F238E27FC236}">
-                <a16:creationId xmlns:a16="http://schemas.microsoft.com/office/drawing/2014/main" id="{1A443D5E-F80F-4F22-8082-A63F4DD67A64}"/>
+                <a16:creationId xmlns:a16="http://schemas.microsoft.com/office/drawing/2014/main" id="{2681B579-787A-45F8-90F4-5F6C82BB22AC}"/>
               </a:ext>
             </a:extLst>
           </p:cNvPr>
@@ -4731,7 +4731,7 @@
           <p:cNvPr id="9" name="">
             <a:extLst xmlns:a="http://schemas.openxmlformats.org/drawingml/2006/main">
               <a:ext uri="{FF2B5EF4-FFF2-40B4-BE49-F238E27FC236}">
-                <a16:creationId xmlns:a16="http://schemas.microsoft.com/office/drawing/2014/main" id="{D9F26CB0-9D5C-4493-B7DD-10BA77AA18B4}"/>
+                <a16:creationId xmlns:a16="http://schemas.microsoft.com/office/drawing/2014/main" id="{54722716-9CD9-487D-A00E-BA06CF3FC8CA}"/>
               </a:ext>
             </a:extLst>
           </p:cNvPr>
@@ -4788,7 +4788,7 @@
           <p:cNvPr id="10" name="">
             <a:extLst xmlns:a="http://schemas.openxmlformats.org/drawingml/2006/main">
               <a:ext uri="{FF2B5EF4-FFF2-40B4-BE49-F238E27FC236}">
-                <a16:creationId xmlns:a16="http://schemas.microsoft.com/office/drawing/2014/main" id="{9C26449F-F9D1-482E-98C7-760F4C4A5348}"/>
+                <a16:creationId xmlns:a16="http://schemas.microsoft.com/office/drawing/2014/main" id="{BEE68B49-4DD8-4E89-8EAF-9C1248B51A80}"/>
               </a:ext>
             </a:extLst>
           </p:cNvPr>
@@ -4822,7 +4822,7 @@
           <p:cNvPr id="11" name="">
             <a:extLst xmlns:a="http://schemas.openxmlformats.org/drawingml/2006/main">
               <a:ext uri="{FF2B5EF4-FFF2-40B4-BE49-F238E27FC236}">
-                <a16:creationId xmlns:a16="http://schemas.microsoft.com/office/drawing/2014/main" id="{C111D64E-472D-4215-A8F7-0885B24918F4}"/>
+                <a16:creationId xmlns:a16="http://schemas.microsoft.com/office/drawing/2014/main" id="{5FB0C60F-FAEC-4365-B804-E58207A5C7F7}"/>
               </a:ext>
             </a:extLst>
           </p:cNvPr>
@@ -4854,7 +4854,7 @@
           <p:cNvPr id="12" name="">
             <a:extLst xmlns:a="http://schemas.openxmlformats.org/drawingml/2006/main">
               <a:ext uri="{FF2B5EF4-FFF2-40B4-BE49-F238E27FC236}">
-                <a16:creationId xmlns:a16="http://schemas.microsoft.com/office/drawing/2014/main" id="{DD78279C-8A3C-40E0-8F4E-8C5034E2FB1F}"/>
+                <a16:creationId xmlns:a16="http://schemas.microsoft.com/office/drawing/2014/main" id="{BCE495C3-A09C-4020-916C-9F8DA5199BC8}"/>
               </a:ext>
             </a:extLst>
           </p:cNvPr>
@@ -4911,7 +4911,7 @@
           <p:cNvPr id="13" name="">
             <a:extLst xmlns:a="http://schemas.openxmlformats.org/drawingml/2006/main">
               <a:ext uri="{FF2B5EF4-FFF2-40B4-BE49-F238E27FC236}">
-                <a16:creationId xmlns:a16="http://schemas.microsoft.com/office/drawing/2014/main" id="{81311427-ECEC-4770-B78C-AF08026317CE}"/>
+                <a16:creationId xmlns:a16="http://schemas.microsoft.com/office/drawing/2014/main" id="{A6174B23-5A5D-402E-A544-3487F5675CE1}"/>
               </a:ext>
             </a:extLst>
           </p:cNvPr>
@@ -4968,7 +4968,7 @@
           <p:cNvPr id="14" name="">
             <a:extLst xmlns:a="http://schemas.openxmlformats.org/drawingml/2006/main">
               <a:ext uri="{FF2B5EF4-FFF2-40B4-BE49-F238E27FC236}">
-                <a16:creationId xmlns:a16="http://schemas.microsoft.com/office/drawing/2014/main" id="{36CCD63A-D94E-4C0F-9385-6DF101FD808B}"/>
+                <a16:creationId xmlns:a16="http://schemas.microsoft.com/office/drawing/2014/main" id="{6796C6FD-91F3-4477-A052-CB7B306EC7E2}"/>
               </a:ext>
             </a:extLst>
           </p:cNvPr>
@@ -5002,7 +5002,7 @@
           <p:cNvPr id="15" name="">
             <a:extLst xmlns:a="http://schemas.openxmlformats.org/drawingml/2006/main">
               <a:ext uri="{FF2B5EF4-FFF2-40B4-BE49-F238E27FC236}">
-                <a16:creationId xmlns:a16="http://schemas.microsoft.com/office/drawing/2014/main" id="{677736B5-FEE4-46A2-A506-6C1E2DCE1A6D}"/>
+                <a16:creationId xmlns:a16="http://schemas.microsoft.com/office/drawing/2014/main" id="{3CED4FAE-9395-4DC0-B057-31F5A677A669}"/>
               </a:ext>
             </a:extLst>
           </p:cNvPr>
@@ -5034,7 +5034,7 @@
           <p:cNvPr id="16" name="">
             <a:extLst xmlns:a="http://schemas.openxmlformats.org/drawingml/2006/main">
               <a:ext uri="{FF2B5EF4-FFF2-40B4-BE49-F238E27FC236}">
-                <a16:creationId xmlns:a16="http://schemas.microsoft.com/office/drawing/2014/main" id="{809CD05B-731E-4D19-A02B-C971BC07F72F}"/>
+                <a16:creationId xmlns:a16="http://schemas.microsoft.com/office/drawing/2014/main" id="{2296BEA6-0F66-41FA-A2A8-CA0EE4A429C2}"/>
               </a:ext>
             </a:extLst>
           </p:cNvPr>
@@ -5091,7 +5091,7 @@
           <p:cNvPr id="17" name="">
             <a:extLst xmlns:a="http://schemas.openxmlformats.org/drawingml/2006/main">
               <a:ext uri="{FF2B5EF4-FFF2-40B4-BE49-F238E27FC236}">
-                <a16:creationId xmlns:a16="http://schemas.microsoft.com/office/drawing/2014/main" id="{ACA9E26C-A216-410C-97E0-78CAD6DE7162}"/>
+                <a16:creationId xmlns:a16="http://schemas.microsoft.com/office/drawing/2014/main" id="{D9A95EE1-CC01-4801-B2D5-73611ACDE79B}"/>
               </a:ext>
             </a:extLst>
           </p:cNvPr>
@@ -5148,7 +5148,7 @@
           <p:cNvPr id="18" name="">
             <a:extLst xmlns:a="http://schemas.openxmlformats.org/drawingml/2006/main">
               <a:ext uri="{FF2B5EF4-FFF2-40B4-BE49-F238E27FC236}">
-                <a16:creationId xmlns:a16="http://schemas.microsoft.com/office/drawing/2014/main" id="{1DBE6B68-0866-43B4-8014-F13CF5CAE41C}"/>
+                <a16:creationId xmlns:a16="http://schemas.microsoft.com/office/drawing/2014/main" id="{0E56627E-6A15-444D-A5E6-94784BB93D02}"/>
               </a:ext>
             </a:extLst>
           </p:cNvPr>
@@ -5182,7 +5182,7 @@
           <p:cNvPr id="19" name="">
             <a:extLst xmlns:a="http://schemas.openxmlformats.org/drawingml/2006/main">
               <a:ext uri="{FF2B5EF4-FFF2-40B4-BE49-F238E27FC236}">
-                <a16:creationId xmlns:a16="http://schemas.microsoft.com/office/drawing/2014/main" id="{ED702507-D9E9-4A2F-A3A6-EC6813AC7937}"/>
+                <a16:creationId xmlns:a16="http://schemas.microsoft.com/office/drawing/2014/main" id="{B3812A3C-84F7-41B0-AC55-0273849E88DB}"/>
               </a:ext>
             </a:extLst>
           </p:cNvPr>
@@ -5214,7 +5214,7 @@
           <p:cNvPr id="20" name="">
             <a:extLst xmlns:a="http://schemas.openxmlformats.org/drawingml/2006/main">
               <a:ext uri="{FF2B5EF4-FFF2-40B4-BE49-F238E27FC236}">
-                <a16:creationId xmlns:a16="http://schemas.microsoft.com/office/drawing/2014/main" id="{0327A479-476C-4D66-89CE-2103275F46D7}"/>
+                <a16:creationId xmlns:a16="http://schemas.microsoft.com/office/drawing/2014/main" id="{89EF8DAC-BDF8-4DEE-ABD5-8B7C6B7B26C6}"/>
               </a:ext>
             </a:extLst>
           </p:cNvPr>
@@ -5271,7 +5271,7 @@
           <p:cNvPr id="21" name="">
             <a:extLst xmlns:a="http://schemas.openxmlformats.org/drawingml/2006/main">
               <a:ext uri="{FF2B5EF4-FFF2-40B4-BE49-F238E27FC236}">
-                <a16:creationId xmlns:a16="http://schemas.microsoft.com/office/drawing/2014/main" id="{BCBC6B0F-5F55-417F-BE65-DA037931FC83}"/>
+                <a16:creationId xmlns:a16="http://schemas.microsoft.com/office/drawing/2014/main" id="{4BFE5ECD-3C3D-4BA2-91AC-823248B1C649}"/>
               </a:ext>
             </a:extLst>
           </p:cNvPr>
@@ -5328,7 +5328,7 @@
           <p:cNvPr id="22" name="">
             <a:extLst xmlns:a="http://schemas.openxmlformats.org/drawingml/2006/main">
               <a:ext uri="{FF2B5EF4-FFF2-40B4-BE49-F238E27FC236}">
-                <a16:creationId xmlns:a16="http://schemas.microsoft.com/office/drawing/2014/main" id="{9DA91702-CF34-45EF-AC8F-91000864D4B1}"/>
+                <a16:creationId xmlns:a16="http://schemas.microsoft.com/office/drawing/2014/main" id="{F16C28D1-B2FF-4F8B-A228-A2BF46997D55}"/>
               </a:ext>
             </a:extLst>
           </p:cNvPr>
@@ -5383,7 +5383,7 @@
     </p:spTree>
     <p:extLst>
       <p:ext uri="{BB962C8B-B14F-4D97-AF65-F5344CB8AC3E}">
-        <p14:creationId xmlns:p14="http://schemas.microsoft.com/office/powerpoint/2010/main" val="1784992877"/>
+        <p14:creationId xmlns:p14="http://schemas.microsoft.com/office/powerpoint/2010/main" val="509090071"/>
       </p:ext>
     </p:extLst>
   </p:cSld>
@@ -5584,7 +5584,7 @@
           <p:cNvPr id="23" name="">
             <a:extLst xmlns:a="http://schemas.openxmlformats.org/drawingml/2006/main">
               <a:ext uri="{FF2B5EF4-FFF2-40B4-BE49-F238E27FC236}">
-                <a16:creationId xmlns:a16="http://schemas.microsoft.com/office/drawing/2014/main" id="{8D04D514-5401-4330-A359-DF4747957AA9}"/>
+                <a16:creationId xmlns:a16="http://schemas.microsoft.com/office/drawing/2014/main" id="{75279F18-9D4C-47D2-9548-F6A63BA07445}"/>
               </a:ext>
             </a:extLst>
           </p:cNvPr>
@@ -5616,7 +5616,7 @@
           <p:cNvPr id="2" name="">
             <a:extLst xmlns:a="http://schemas.openxmlformats.org/drawingml/2006/main">
               <a:ext uri="{FF2B5EF4-FFF2-40B4-BE49-F238E27FC236}">
-                <a16:creationId xmlns:a16="http://schemas.microsoft.com/office/drawing/2014/main" id="{08D79B0D-27D4-42A3-93EE-7A1CDEB4A3C8}"/>
+                <a16:creationId xmlns:a16="http://schemas.microsoft.com/office/drawing/2014/main" id="{F5DF5342-B0E8-48FB-8EA4-B384C7EE1301}"/>
               </a:ext>
             </a:extLst>
           </p:cNvPr>
@@ -5673,7 +5673,7 @@
           <p:cNvPr id="3" name="">
             <a:extLst xmlns:a="http://schemas.openxmlformats.org/drawingml/2006/main">
               <a:ext uri="{FF2B5EF4-FFF2-40B4-BE49-F238E27FC236}">
-                <a16:creationId xmlns:a16="http://schemas.microsoft.com/office/drawing/2014/main" id="{848E482E-BCB9-47BA-8084-8EFEE6581884}"/>
+                <a16:creationId xmlns:a16="http://schemas.microsoft.com/office/drawing/2014/main" id="{BC6A4AF2-5404-4276-A32E-9B8D59F054E2}"/>
               </a:ext>
             </a:extLst>
           </p:cNvPr>
@@ -5705,7 +5705,7 @@
           <p:cNvPr id="4" name="">
             <a:extLst xmlns:a="http://schemas.openxmlformats.org/drawingml/2006/main">
               <a:ext uri="{FF2B5EF4-FFF2-40B4-BE49-F238E27FC236}">
-                <a16:creationId xmlns:a16="http://schemas.microsoft.com/office/drawing/2014/main" id="{AB9399E3-5389-40F0-80BC-4FE840EB8226}"/>
+                <a16:creationId xmlns:a16="http://schemas.microsoft.com/office/drawing/2014/main" id="{CCD0405A-DDAE-40BB-BE07-E14D98ED3D90}"/>
               </a:ext>
             </a:extLst>
           </p:cNvPr>
@@ -5762,7 +5762,7 @@
           <p:cNvPr id="5" name="">
             <a:extLst xmlns:a="http://schemas.openxmlformats.org/drawingml/2006/main">
               <a:ext uri="{FF2B5EF4-FFF2-40B4-BE49-F238E27FC236}">
-                <a16:creationId xmlns:a16="http://schemas.microsoft.com/office/drawing/2014/main" id="{05A89412-62F2-4906-8334-C4810520ACE5}"/>
+                <a16:creationId xmlns:a16="http://schemas.microsoft.com/office/drawing/2014/main" id="{02FE02C7-FC34-4E89-A00F-80DD6C9B5DCD}"/>
               </a:ext>
             </a:extLst>
           </p:cNvPr>
@@ -5819,7 +5819,7 @@
           <p:cNvPr id="6" name="">
             <a:extLst xmlns:a="http://schemas.openxmlformats.org/drawingml/2006/main">
               <a:ext uri="{FF2B5EF4-FFF2-40B4-BE49-F238E27FC236}">
-                <a16:creationId xmlns:a16="http://schemas.microsoft.com/office/drawing/2014/main" id="{4056AAB4-7BB9-4CC9-BE0C-AD9F8AF6B69A}"/>
+                <a16:creationId xmlns:a16="http://schemas.microsoft.com/office/drawing/2014/main" id="{2D5EBB6A-973F-4956-8412-3EEC82BB0AB0}"/>
               </a:ext>
             </a:extLst>
           </p:cNvPr>
@@ -5876,7 +5876,7 @@
           <p:cNvPr id="7" name="">
             <a:extLst xmlns:a="http://schemas.openxmlformats.org/drawingml/2006/main">
               <a:ext uri="{FF2B5EF4-FFF2-40B4-BE49-F238E27FC236}">
-                <a16:creationId xmlns:a16="http://schemas.microsoft.com/office/drawing/2014/main" id="{96515076-5C95-40F6-83F5-513C8A3911D3}"/>
+                <a16:creationId xmlns:a16="http://schemas.microsoft.com/office/drawing/2014/main" id="{4CCE0D8A-6F87-4E9E-BEDD-8B80BDBBDF84}"/>
               </a:ext>
             </a:extLst>
           </p:cNvPr>
@@ -5908,7 +5908,7 @@
           <p:cNvPr id="8" name="">
             <a:extLst xmlns:a="http://schemas.openxmlformats.org/drawingml/2006/main">
               <a:ext uri="{FF2B5EF4-FFF2-40B4-BE49-F238E27FC236}">
-                <a16:creationId xmlns:a16="http://schemas.microsoft.com/office/drawing/2014/main" id="{8F23DFEB-44D3-46D4-B202-85F9628A5222}"/>
+                <a16:creationId xmlns:a16="http://schemas.microsoft.com/office/drawing/2014/main" id="{6A3586A0-155B-42CB-A902-E3D0A212540C}"/>
               </a:ext>
             </a:extLst>
           </p:cNvPr>
@@ -5965,7 +5965,7 @@
           <p:cNvPr id="9" name="">
             <a:extLst xmlns:a="http://schemas.openxmlformats.org/drawingml/2006/main">
               <a:ext uri="{FF2B5EF4-FFF2-40B4-BE49-F238E27FC236}">
-                <a16:creationId xmlns:a16="http://schemas.microsoft.com/office/drawing/2014/main" id="{9D30BD47-CB6A-4EC5-B577-EDD2D9664CB5}"/>
+                <a16:creationId xmlns:a16="http://schemas.microsoft.com/office/drawing/2014/main" id="{BA527361-4FC8-4B42-9F4D-5071A773716A}"/>
               </a:ext>
             </a:extLst>
           </p:cNvPr>
@@ -6022,7 +6022,7 @@
           <p:cNvPr id="10" name="">
             <a:extLst xmlns:a="http://schemas.openxmlformats.org/drawingml/2006/main">
               <a:ext uri="{FF2B5EF4-FFF2-40B4-BE49-F238E27FC236}">
-                <a16:creationId xmlns:a16="http://schemas.microsoft.com/office/drawing/2014/main" id="{F9E51AEE-ADFD-4E01-96EA-31ACDBB9E08F}"/>
+                <a16:creationId xmlns:a16="http://schemas.microsoft.com/office/drawing/2014/main" id="{2F49F77F-E95A-424B-AD94-A5FC77B57D76}"/>
               </a:ext>
             </a:extLst>
           </p:cNvPr>
@@ -6056,7 +6056,7 @@
           <p:cNvPr id="11" name="">
             <a:extLst xmlns:a="http://schemas.openxmlformats.org/drawingml/2006/main">
               <a:ext uri="{FF2B5EF4-FFF2-40B4-BE49-F238E27FC236}">
-                <a16:creationId xmlns:a16="http://schemas.microsoft.com/office/drawing/2014/main" id="{E036F4F2-C858-48DD-BA80-495423A0A699}"/>
+                <a16:creationId xmlns:a16="http://schemas.microsoft.com/office/drawing/2014/main" id="{49AB538A-4116-496A-B841-CAD4863DEC09}"/>
               </a:ext>
             </a:extLst>
           </p:cNvPr>
@@ -6088,7 +6088,7 @@
           <p:cNvPr id="12" name="">
             <a:extLst xmlns:a="http://schemas.openxmlformats.org/drawingml/2006/main">
               <a:ext uri="{FF2B5EF4-FFF2-40B4-BE49-F238E27FC236}">
-                <a16:creationId xmlns:a16="http://schemas.microsoft.com/office/drawing/2014/main" id="{40318FFC-4BED-4F3F-8095-6EC6B5FE6964}"/>
+                <a16:creationId xmlns:a16="http://schemas.microsoft.com/office/drawing/2014/main" id="{6FA0CB4E-8483-4E15-9C06-E37F6ACD2690}"/>
               </a:ext>
             </a:extLst>
           </p:cNvPr>
@@ -6145,7 +6145,7 @@
           <p:cNvPr id="13" name="">
             <a:extLst xmlns:a="http://schemas.openxmlformats.org/drawingml/2006/main">
               <a:ext uri="{FF2B5EF4-FFF2-40B4-BE49-F238E27FC236}">
-                <a16:creationId xmlns:a16="http://schemas.microsoft.com/office/drawing/2014/main" id="{042A8537-199B-4224-B001-E423E7AC0496}"/>
+                <a16:creationId xmlns:a16="http://schemas.microsoft.com/office/drawing/2014/main" id="{CA8C0419-316D-4708-9DF9-3A8A39D2AB85}"/>
               </a:ext>
             </a:extLst>
           </p:cNvPr>
@@ -6202,7 +6202,7 @@
           <p:cNvPr id="14" name="">
             <a:extLst xmlns:a="http://schemas.openxmlformats.org/drawingml/2006/main">
               <a:ext uri="{FF2B5EF4-FFF2-40B4-BE49-F238E27FC236}">
-                <a16:creationId xmlns:a16="http://schemas.microsoft.com/office/drawing/2014/main" id="{D7AD65DB-6BF3-4A1A-88F2-CA7F50BBE61E}"/>
+                <a16:creationId xmlns:a16="http://schemas.microsoft.com/office/drawing/2014/main" id="{FEC340D1-8629-48FB-ABE1-001F7A07EB62}"/>
               </a:ext>
             </a:extLst>
           </p:cNvPr>
@@ -6236,7 +6236,7 @@
           <p:cNvPr id="15" name="">
             <a:extLst xmlns:a="http://schemas.openxmlformats.org/drawingml/2006/main">
               <a:ext uri="{FF2B5EF4-FFF2-40B4-BE49-F238E27FC236}">
-                <a16:creationId xmlns:a16="http://schemas.microsoft.com/office/drawing/2014/main" id="{7E994A75-CD2C-4274-BF37-63AAEFB3D138}"/>
+                <a16:creationId xmlns:a16="http://schemas.microsoft.com/office/drawing/2014/main" id="{44345305-2B58-4027-865E-D0B21D3B918C}"/>
               </a:ext>
             </a:extLst>
           </p:cNvPr>
@@ -6268,7 +6268,7 @@
           <p:cNvPr id="16" name="">
             <a:extLst xmlns:a="http://schemas.openxmlformats.org/drawingml/2006/main">
               <a:ext uri="{FF2B5EF4-FFF2-40B4-BE49-F238E27FC236}">
-                <a16:creationId xmlns:a16="http://schemas.microsoft.com/office/drawing/2014/main" id="{108F8C67-9CD1-4BAB-B155-363C9AE78DEE}"/>
+                <a16:creationId xmlns:a16="http://schemas.microsoft.com/office/drawing/2014/main" id="{A729E130-9278-4DF2-85C5-BD121062A64F}"/>
               </a:ext>
             </a:extLst>
           </p:cNvPr>
@@ -6325,7 +6325,7 @@
           <p:cNvPr id="17" name="">
             <a:extLst xmlns:a="http://schemas.openxmlformats.org/drawingml/2006/main">
               <a:ext uri="{FF2B5EF4-FFF2-40B4-BE49-F238E27FC236}">
-                <a16:creationId xmlns:a16="http://schemas.microsoft.com/office/drawing/2014/main" id="{A5DF774F-804C-4EA4-9A30-6F20CB5DC11C}"/>
+                <a16:creationId xmlns:a16="http://schemas.microsoft.com/office/drawing/2014/main" id="{EE0A4AA5-B0DC-47A5-A28A-0AC92A46D20A}"/>
               </a:ext>
             </a:extLst>
           </p:cNvPr>
@@ -6382,7 +6382,7 @@
           <p:cNvPr id="18" name="">
             <a:extLst xmlns:a="http://schemas.openxmlformats.org/drawingml/2006/main">
               <a:ext uri="{FF2B5EF4-FFF2-40B4-BE49-F238E27FC236}">
-                <a16:creationId xmlns:a16="http://schemas.microsoft.com/office/drawing/2014/main" id="{B3419519-5834-4C0B-8DBC-AC53843BC852}"/>
+                <a16:creationId xmlns:a16="http://schemas.microsoft.com/office/drawing/2014/main" id="{CC617383-ABBB-4063-A1EF-21611033F538}"/>
               </a:ext>
             </a:extLst>
           </p:cNvPr>
@@ -6416,7 +6416,7 @@
           <p:cNvPr id="19" name="">
             <a:extLst xmlns:a="http://schemas.openxmlformats.org/drawingml/2006/main">
               <a:ext uri="{FF2B5EF4-FFF2-40B4-BE49-F238E27FC236}">
-                <a16:creationId xmlns:a16="http://schemas.microsoft.com/office/drawing/2014/main" id="{462BCC2C-83E7-4019-B0CB-685BCD9820D3}"/>
+                <a16:creationId xmlns:a16="http://schemas.microsoft.com/office/drawing/2014/main" id="{416767E9-AF3A-4FB1-A73E-F9CC57ACDF8C}"/>
               </a:ext>
             </a:extLst>
           </p:cNvPr>
@@ -6448,7 +6448,7 @@
           <p:cNvPr id="20" name="">
             <a:extLst xmlns:a="http://schemas.openxmlformats.org/drawingml/2006/main">
               <a:ext uri="{FF2B5EF4-FFF2-40B4-BE49-F238E27FC236}">
-                <a16:creationId xmlns:a16="http://schemas.microsoft.com/office/drawing/2014/main" id="{BC96BE24-AC68-42EB-BB31-3AA9A07C9E04}"/>
+                <a16:creationId xmlns:a16="http://schemas.microsoft.com/office/drawing/2014/main" id="{D57BB288-E39A-40B7-8A63-A053A8978B97}"/>
               </a:ext>
             </a:extLst>
           </p:cNvPr>
@@ -6505,7 +6505,7 @@
           <p:cNvPr id="21" name="">
             <a:extLst xmlns:a="http://schemas.openxmlformats.org/drawingml/2006/main">
               <a:ext uri="{FF2B5EF4-FFF2-40B4-BE49-F238E27FC236}">
-                <a16:creationId xmlns:a16="http://schemas.microsoft.com/office/drawing/2014/main" id="{2E264369-525C-4D2A-9A91-9DB54525C195}"/>
+                <a16:creationId xmlns:a16="http://schemas.microsoft.com/office/drawing/2014/main" id="{0A916CA0-A3C0-43AD-8617-4AFAFAF6274C}"/>
               </a:ext>
             </a:extLst>
           </p:cNvPr>
@@ -6562,7 +6562,7 @@
           <p:cNvPr id="22" name="">
             <a:extLst xmlns:a="http://schemas.openxmlformats.org/drawingml/2006/main">
               <a:ext uri="{FF2B5EF4-FFF2-40B4-BE49-F238E27FC236}">
-                <a16:creationId xmlns:a16="http://schemas.microsoft.com/office/drawing/2014/main" id="{C8F80F4E-B536-4623-B1FB-DA8CE7DCDA6E}"/>
+                <a16:creationId xmlns:a16="http://schemas.microsoft.com/office/drawing/2014/main" id="{B96B263C-8B2D-478A-A2EF-BA8838AA885E}"/>
               </a:ext>
             </a:extLst>
           </p:cNvPr>
@@ -6617,7 +6617,7 @@
     </p:spTree>
     <p:extLst>
       <p:ext uri="{BB962C8B-B14F-4D97-AF65-F5344CB8AC3E}">
-        <p14:creationId xmlns:p14="http://schemas.microsoft.com/office/powerpoint/2010/main" val="1760101315"/>
+        <p14:creationId xmlns:p14="http://schemas.microsoft.com/office/powerpoint/2010/main" val="1575941336"/>
       </p:ext>
     </p:extLst>
   </p:cSld>
@@ -6818,7 +6818,7 @@
           <p:cNvPr id="16" name="">
             <a:extLst xmlns:a="http://schemas.openxmlformats.org/drawingml/2006/main">
               <a:ext uri="{FF2B5EF4-FFF2-40B4-BE49-F238E27FC236}">
-                <a16:creationId xmlns:a16="http://schemas.microsoft.com/office/drawing/2014/main" id="{2B6994B0-08CA-4AF2-B4AE-AEA1ABC9F4F0}"/>
+                <a16:creationId xmlns:a16="http://schemas.microsoft.com/office/drawing/2014/main" id="{E142D188-89FB-46A6-A5EF-34BC513F5431}"/>
               </a:ext>
             </a:extLst>
           </p:cNvPr>
@@ -6850,7 +6850,7 @@
           <p:cNvPr id="2" name="">
             <a:extLst xmlns:a="http://schemas.openxmlformats.org/drawingml/2006/main">
               <a:ext uri="{FF2B5EF4-FFF2-40B4-BE49-F238E27FC236}">
-                <a16:creationId xmlns:a16="http://schemas.microsoft.com/office/drawing/2014/main" id="{16D2145B-393D-4FBD-B124-1F9407D5D964}"/>
+                <a16:creationId xmlns:a16="http://schemas.microsoft.com/office/drawing/2014/main" id="{3AD1E3D1-F2DC-491C-BA22-146317E8EFC2}"/>
               </a:ext>
             </a:extLst>
           </p:cNvPr>
@@ -6907,7 +6907,7 @@
           <p:cNvPr id="3" name="">
             <a:extLst xmlns:a="http://schemas.openxmlformats.org/drawingml/2006/main">
               <a:ext uri="{FF2B5EF4-FFF2-40B4-BE49-F238E27FC236}">
-                <a16:creationId xmlns:a16="http://schemas.microsoft.com/office/drawing/2014/main" id="{29E3F62D-2E33-4184-BA7A-B823210B2047}"/>
+                <a16:creationId xmlns:a16="http://schemas.microsoft.com/office/drawing/2014/main" id="{32D00D28-D8FB-4C8C-B4ED-A5A0270287A9}"/>
               </a:ext>
             </a:extLst>
           </p:cNvPr>
@@ -6939,7 +6939,7 @@
           <p:cNvPr id="4" name="">
             <a:extLst xmlns:a="http://schemas.openxmlformats.org/drawingml/2006/main">
               <a:ext uri="{FF2B5EF4-FFF2-40B4-BE49-F238E27FC236}">
-                <a16:creationId xmlns:a16="http://schemas.microsoft.com/office/drawing/2014/main" id="{4FC88F1E-2B00-47B3-A667-BEA4B07A3AEB}"/>
+                <a16:creationId xmlns:a16="http://schemas.microsoft.com/office/drawing/2014/main" id="{D0CDFD40-1143-4839-A7A8-187FA44672F9}"/>
               </a:ext>
             </a:extLst>
           </p:cNvPr>
@@ -6996,7 +6996,7 @@
           <p:cNvPr id="5" name="">
             <a:extLst xmlns:a="http://schemas.openxmlformats.org/drawingml/2006/main">
               <a:ext uri="{FF2B5EF4-FFF2-40B4-BE49-F238E27FC236}">
-                <a16:creationId xmlns:a16="http://schemas.microsoft.com/office/drawing/2014/main" id="{090FC502-670D-4FC9-A072-9352AFF672C4}"/>
+                <a16:creationId xmlns:a16="http://schemas.microsoft.com/office/drawing/2014/main" id="{D91B1EFE-A0F4-4C77-A62F-45078464A0F5}"/>
               </a:ext>
             </a:extLst>
           </p:cNvPr>
@@ -7053,7 +7053,7 @@
           <p:cNvPr id="6" name="">
             <a:extLst xmlns:a="http://schemas.openxmlformats.org/drawingml/2006/main">
               <a:ext uri="{FF2B5EF4-FFF2-40B4-BE49-F238E27FC236}">
-                <a16:creationId xmlns:a16="http://schemas.microsoft.com/office/drawing/2014/main" id="{7C7B853F-C2A5-4E42-9688-D18B07E651F0}"/>
+                <a16:creationId xmlns:a16="http://schemas.microsoft.com/office/drawing/2014/main" id="{4B870EAD-D401-49BA-B2CF-A1723DBD30A8}"/>
               </a:ext>
             </a:extLst>
           </p:cNvPr>
@@ -7110,7 +7110,7 @@
           <p:cNvPr id="7" name="">
             <a:extLst xmlns:a="http://schemas.openxmlformats.org/drawingml/2006/main">
               <a:ext uri="{FF2B5EF4-FFF2-40B4-BE49-F238E27FC236}">
-                <a16:creationId xmlns:a16="http://schemas.microsoft.com/office/drawing/2014/main" id="{9CFC417B-5A55-4444-B5FC-72605F507376}"/>
+                <a16:creationId xmlns:a16="http://schemas.microsoft.com/office/drawing/2014/main" id="{A82926FA-3902-4C28-9AE6-E181486F2017}"/>
               </a:ext>
             </a:extLst>
           </p:cNvPr>
@@ -7142,7 +7142,7 @@
           <p:cNvPr id="8" name="">
             <a:extLst xmlns:a="http://schemas.openxmlformats.org/drawingml/2006/main">
               <a:ext uri="{FF2B5EF4-FFF2-40B4-BE49-F238E27FC236}">
-                <a16:creationId xmlns:a16="http://schemas.microsoft.com/office/drawing/2014/main" id="{16F07CF6-32A8-4302-BCAE-2E987199FBFC}"/>
+                <a16:creationId xmlns:a16="http://schemas.microsoft.com/office/drawing/2014/main" id="{27B35083-92BA-4B70-9BAE-E10330D81EC6}"/>
               </a:ext>
             </a:extLst>
           </p:cNvPr>
@@ -7199,7 +7199,7 @@
           <p:cNvPr id="9" name="">
             <a:extLst xmlns:a="http://schemas.openxmlformats.org/drawingml/2006/main">
               <a:ext uri="{FF2B5EF4-FFF2-40B4-BE49-F238E27FC236}">
-                <a16:creationId xmlns:a16="http://schemas.microsoft.com/office/drawing/2014/main" id="{CB744E5C-982A-4614-9991-F27E1680DD68}"/>
+                <a16:creationId xmlns:a16="http://schemas.microsoft.com/office/drawing/2014/main" id="{32A1CA0C-15A1-4F8E-8C7C-3829360CF48C}"/>
               </a:ext>
             </a:extLst>
           </p:cNvPr>
@@ -7256,7 +7256,7 @@
           <p:cNvPr id="10" name="">
             <a:extLst xmlns:a="http://schemas.openxmlformats.org/drawingml/2006/main">
               <a:ext uri="{FF2B5EF4-FFF2-40B4-BE49-F238E27FC236}">
-                <a16:creationId xmlns:a16="http://schemas.microsoft.com/office/drawing/2014/main" id="{F20193B5-023E-40BD-A356-52037C9B64F2}"/>
+                <a16:creationId xmlns:a16="http://schemas.microsoft.com/office/drawing/2014/main" id="{3948F1F7-AB2F-4076-8932-4FFDDC7EEE09}"/>
               </a:ext>
             </a:extLst>
           </p:cNvPr>
@@ -7313,7 +7313,7 @@
           <p:cNvPr id="11" name="">
             <a:extLst xmlns:a="http://schemas.openxmlformats.org/drawingml/2006/main">
               <a:ext uri="{FF2B5EF4-FFF2-40B4-BE49-F238E27FC236}">
-                <a16:creationId xmlns:a16="http://schemas.microsoft.com/office/drawing/2014/main" id="{6200BD3E-2799-4D93-9F3A-DA720183BF60}"/>
+                <a16:creationId xmlns:a16="http://schemas.microsoft.com/office/drawing/2014/main" id="{324510C5-924C-4541-8180-9F26E31EB0DC}"/>
               </a:ext>
             </a:extLst>
           </p:cNvPr>
@@ -7345,7 +7345,7 @@
           <p:cNvPr id="12" name="">
             <a:extLst xmlns:a="http://schemas.openxmlformats.org/drawingml/2006/main">
               <a:ext uri="{FF2B5EF4-FFF2-40B4-BE49-F238E27FC236}">
-                <a16:creationId xmlns:a16="http://schemas.microsoft.com/office/drawing/2014/main" id="{2060DBEB-37CF-4508-B74E-7A2D753F7E62}"/>
+                <a16:creationId xmlns:a16="http://schemas.microsoft.com/office/drawing/2014/main" id="{CEB7D75A-70AB-41EB-A627-9BEA008BFEF2}"/>
               </a:ext>
             </a:extLst>
           </p:cNvPr>
@@ -7402,7 +7402,7 @@
           <p:cNvPr id="13" name="">
             <a:extLst xmlns:a="http://schemas.openxmlformats.org/drawingml/2006/main">
               <a:ext uri="{FF2B5EF4-FFF2-40B4-BE49-F238E27FC236}">
-                <a16:creationId xmlns:a16="http://schemas.microsoft.com/office/drawing/2014/main" id="{D5500AE8-3439-4398-9341-FD77DF1AB0A7}"/>
+                <a16:creationId xmlns:a16="http://schemas.microsoft.com/office/drawing/2014/main" id="{B23965DB-9E81-40B2-8C11-40FC6146DEB4}"/>
               </a:ext>
             </a:extLst>
           </p:cNvPr>
@@ -7459,7 +7459,7 @@
           <p:cNvPr id="14" name="">
             <a:extLst xmlns:a="http://schemas.openxmlformats.org/drawingml/2006/main">
               <a:ext uri="{FF2B5EF4-FFF2-40B4-BE49-F238E27FC236}">
-                <a16:creationId xmlns:a16="http://schemas.microsoft.com/office/drawing/2014/main" id="{4140A56A-0E8F-4937-A705-DDA8DA40ECEF}"/>
+                <a16:creationId xmlns:a16="http://schemas.microsoft.com/office/drawing/2014/main" id="{AFBCCA68-89E9-4F5E-BB9C-25F2907870FA}"/>
               </a:ext>
             </a:extLst>
           </p:cNvPr>
@@ -7516,7 +7516,7 @@
           <p:cNvPr id="15" name="">
             <a:extLst xmlns:a="http://schemas.openxmlformats.org/drawingml/2006/main">
               <a:ext uri="{FF2B5EF4-FFF2-40B4-BE49-F238E27FC236}">
-                <a16:creationId xmlns:a16="http://schemas.microsoft.com/office/drawing/2014/main" id="{9CDE186D-D337-40C3-9EC0-66EFA6FA9435}"/>
+                <a16:creationId xmlns:a16="http://schemas.microsoft.com/office/drawing/2014/main" id="{F9C607D6-4952-4F3F-A0EB-EF75A131C806}"/>
               </a:ext>
             </a:extLst>
           </p:cNvPr>
@@ -7571,7 +7571,7 @@
     </p:spTree>
     <p:extLst>
       <p:ext uri="{BB962C8B-B14F-4D97-AF65-F5344CB8AC3E}">
-        <p14:creationId xmlns:p14="http://schemas.microsoft.com/office/powerpoint/2010/main" val="1900985859"/>
+        <p14:creationId xmlns:p14="http://schemas.microsoft.com/office/powerpoint/2010/main" val="1640381713"/>
       </p:ext>
     </p:extLst>
   </p:cSld>
@@ -7772,7 +7772,7 @@
           <p:cNvPr id="23" name="">
             <a:extLst xmlns:a="http://schemas.openxmlformats.org/drawingml/2006/main">
               <a:ext uri="{FF2B5EF4-FFF2-40B4-BE49-F238E27FC236}">
-                <a16:creationId xmlns:a16="http://schemas.microsoft.com/office/drawing/2014/main" id="{A70FCA2A-73DC-4604-869E-E35D5AA44B28}"/>
+                <a16:creationId xmlns:a16="http://schemas.microsoft.com/office/drawing/2014/main" id="{D78D64DD-C19F-458A-A35D-2639506358AF}"/>
               </a:ext>
             </a:extLst>
           </p:cNvPr>
@@ -7804,7 +7804,7 @@
           <p:cNvPr id="2" name="">
             <a:extLst xmlns:a="http://schemas.openxmlformats.org/drawingml/2006/main">
               <a:ext uri="{FF2B5EF4-FFF2-40B4-BE49-F238E27FC236}">
-                <a16:creationId xmlns:a16="http://schemas.microsoft.com/office/drawing/2014/main" id="{BD10B6D5-0436-4AC0-9466-F7B01DD77EAF}"/>
+                <a16:creationId xmlns:a16="http://schemas.microsoft.com/office/drawing/2014/main" id="{FBC5380B-9250-45AC-9983-60F09348712D}"/>
               </a:ext>
             </a:extLst>
           </p:cNvPr>
@@ -7861,7 +7861,7 @@
           <p:cNvPr id="3" name="">
             <a:extLst xmlns:a="http://schemas.openxmlformats.org/drawingml/2006/main">
               <a:ext uri="{FF2B5EF4-FFF2-40B4-BE49-F238E27FC236}">
-                <a16:creationId xmlns:a16="http://schemas.microsoft.com/office/drawing/2014/main" id="{B496E508-85EE-4422-9AFF-B8C16B6B35A6}"/>
+                <a16:creationId xmlns:a16="http://schemas.microsoft.com/office/drawing/2014/main" id="{485250C5-602D-44B3-8D34-F223E9258878}"/>
               </a:ext>
             </a:extLst>
           </p:cNvPr>
@@ -7893,7 +7893,7 @@
           <p:cNvPr id="4" name="">
             <a:extLst xmlns:a="http://schemas.openxmlformats.org/drawingml/2006/main">
               <a:ext uri="{FF2B5EF4-FFF2-40B4-BE49-F238E27FC236}">
-                <a16:creationId xmlns:a16="http://schemas.microsoft.com/office/drawing/2014/main" id="{87DAC430-70A7-47E8-8CB2-F59E615DF0E3}"/>
+                <a16:creationId xmlns:a16="http://schemas.microsoft.com/office/drawing/2014/main" id="{7AF12294-E0D3-41C9-92E2-CC9EC0EC85D4}"/>
               </a:ext>
             </a:extLst>
           </p:cNvPr>
@@ -7950,7 +7950,7 @@
           <p:cNvPr id="5" name="">
             <a:extLst xmlns:a="http://schemas.openxmlformats.org/drawingml/2006/main">
               <a:ext uri="{FF2B5EF4-FFF2-40B4-BE49-F238E27FC236}">
-                <a16:creationId xmlns:a16="http://schemas.microsoft.com/office/drawing/2014/main" id="{D9FD00EE-A719-4298-A0BD-2D149219A2A4}"/>
+                <a16:creationId xmlns:a16="http://schemas.microsoft.com/office/drawing/2014/main" id="{6205E36A-230B-4936-A82E-E37FDCFF346A}"/>
               </a:ext>
             </a:extLst>
           </p:cNvPr>
@@ -8007,7 +8007,7 @@
           <p:cNvPr id="6" name="">
             <a:extLst xmlns:a="http://schemas.openxmlformats.org/drawingml/2006/main">
               <a:ext uri="{FF2B5EF4-FFF2-40B4-BE49-F238E27FC236}">
-                <a16:creationId xmlns:a16="http://schemas.microsoft.com/office/drawing/2014/main" id="{727C2F39-A202-4D69-B447-8835ADE47AD4}"/>
+                <a16:creationId xmlns:a16="http://schemas.microsoft.com/office/drawing/2014/main" id="{AFADA5F6-6928-4C24-A043-65A0792A7E89}"/>
               </a:ext>
             </a:extLst>
           </p:cNvPr>
@@ -8064,7 +8064,7 @@
           <p:cNvPr id="7" name="">
             <a:extLst xmlns:a="http://schemas.openxmlformats.org/drawingml/2006/main">
               <a:ext uri="{FF2B5EF4-FFF2-40B4-BE49-F238E27FC236}">
-                <a16:creationId xmlns:a16="http://schemas.microsoft.com/office/drawing/2014/main" id="{1028BB76-E976-45F8-A234-05C01A070691}"/>
+                <a16:creationId xmlns:a16="http://schemas.microsoft.com/office/drawing/2014/main" id="{6D03DC64-1A01-4205-9EE2-18404FDD59E6}"/>
               </a:ext>
             </a:extLst>
           </p:cNvPr>
@@ -8096,7 +8096,7 @@
           <p:cNvPr id="8" name="">
             <a:extLst xmlns:a="http://schemas.openxmlformats.org/drawingml/2006/main">
               <a:ext uri="{FF2B5EF4-FFF2-40B4-BE49-F238E27FC236}">
-                <a16:creationId xmlns:a16="http://schemas.microsoft.com/office/drawing/2014/main" id="{B221475C-2165-4427-AD40-50CF6E75AEAD}"/>
+                <a16:creationId xmlns:a16="http://schemas.microsoft.com/office/drawing/2014/main" id="{244373BD-12E5-45D0-891A-6B4FEE996B44}"/>
               </a:ext>
             </a:extLst>
           </p:cNvPr>
@@ -8153,7 +8153,7 @@
           <p:cNvPr id="9" name="">
             <a:extLst xmlns:a="http://schemas.openxmlformats.org/drawingml/2006/main">
               <a:ext uri="{FF2B5EF4-FFF2-40B4-BE49-F238E27FC236}">
-                <a16:creationId xmlns:a16="http://schemas.microsoft.com/office/drawing/2014/main" id="{244EF156-5408-4A81-8190-F7201145C77F}"/>
+                <a16:creationId xmlns:a16="http://schemas.microsoft.com/office/drawing/2014/main" id="{E1C4CFBD-B4EA-4FD7-B541-C0CBEBA6E668}"/>
               </a:ext>
             </a:extLst>
           </p:cNvPr>
@@ -8210,19 +8210,19 @@
           <p:cNvPr id="10" name="">
             <a:extLst xmlns:a="http://schemas.openxmlformats.org/drawingml/2006/main">
               <a:ext uri="{FF2B5EF4-FFF2-40B4-BE49-F238E27FC236}">
-                <a16:creationId xmlns:a16="http://schemas.microsoft.com/office/drawing/2014/main" id="{954A91BE-7993-48C6-83B7-649A05F0009D}"/>
-              </a:ext>
-            </a:extLst>
-          </p:cNvPr>
-          <p:cNvSpPr>
-            <a:spLocks xmlns:a="http://schemas.openxmlformats.org/drawingml/2006/main" noGrp="1"/>
-          </p:cNvSpPr>
-          <p:nvPr/>
-        </p:nvSpPr>
-        <p:spPr>
-          <a:xfrm xmlns:a="http://schemas.openxmlformats.org/drawingml/2006/main">
-            <a:off x="914400" y="1257300"/>
-            <a:ext cx="10363200" cy="781050"/>
+                <a16:creationId xmlns:a16="http://schemas.microsoft.com/office/drawing/2014/main" id="{2712EABA-66C4-40D5-B180-4BB7429B08FD}"/>
+              </a:ext>
+            </a:extLst>
+          </p:cNvPr>
+          <p:cNvSpPr>
+            <a:spLocks xmlns:a="http://schemas.openxmlformats.org/drawingml/2006/main" noGrp="1"/>
+          </p:cNvSpPr>
+          <p:nvPr/>
+        </p:nvSpPr>
+        <p:spPr>
+          <a:xfrm xmlns:a="http://schemas.openxmlformats.org/drawingml/2006/main">
+            <a:off x="857250" y="1219200"/>
+            <a:ext cx="10477500" cy="742950"/>
           </a:xfrm>
           <a:prstGeom xmlns:a="http://schemas.openxmlformats.org/drawingml/2006/main" prst="rect">
             <a:avLst/>
@@ -8239,7 +8239,7 @@
           <a:lstStyle xmlns:a="http://schemas.openxmlformats.org/drawingml/2006/main"/>
           <a:p xmlns:a="http://schemas.openxmlformats.org/drawingml/2006/main">
             <a:pPr algn="ctr">
-              <a:defRPr sz="2175" b="1">
+              <a:defRPr sz="2100" b="1">
                 <a:solidFill>
                   <a:srgbClr val="17253A"/>
                 </a:solidFill>
@@ -8249,7 +8249,7 @@
               </a:defRPr>
             </a:pPr>
             <a:r>
-              <a:rPr sz="2175" b="1">
+              <a:rPr sz="2100" b="1">
                 <a:solidFill>
                   <a:srgbClr val="17253A"/>
                 </a:solidFill>
@@ -8267,28 +8267,30 @@
           <p:cNvPr id="11" name="">
             <a:extLst xmlns:a="http://schemas.openxmlformats.org/drawingml/2006/main">
               <a:ext uri="{FF2B5EF4-FFF2-40B4-BE49-F238E27FC236}">
-                <a16:creationId xmlns:a16="http://schemas.microsoft.com/office/drawing/2014/main" id="{22CBEB4A-9A03-4D04-B107-8B9EB6025125}"/>
-              </a:ext>
-            </a:extLst>
-          </p:cNvPr>
-          <p:cNvSpPr>
-            <a:spLocks xmlns:a="http://schemas.openxmlformats.org/drawingml/2006/main" noGrp="1"/>
-          </p:cNvSpPr>
-          <p:nvPr/>
-        </p:nvSpPr>
-        <p:spPr>
-          <a:xfrm xmlns:a="http://schemas.openxmlformats.org/drawingml/2006/main">
-            <a:off x="1000125" y="2247900"/>
-            <a:ext cx="476250" cy="476250"/>
-          </a:xfrm>
-          <a:prstGeom xmlns:a="http://schemas.openxmlformats.org/drawingml/2006/main" prst="ellipse">
+                <a16:creationId xmlns:a16="http://schemas.microsoft.com/office/drawing/2014/main" id="{85BC8735-CB20-4036-85E5-4C809306F8A2}"/>
+              </a:ext>
+            </a:extLst>
+          </p:cNvPr>
+          <p:cNvSpPr>
+            <a:spLocks xmlns:a="http://schemas.openxmlformats.org/drawingml/2006/main" noGrp="1"/>
+          </p:cNvSpPr>
+          <p:nvPr/>
+        </p:nvSpPr>
+        <p:spPr>
+          <a:xfrm xmlns:a="http://schemas.openxmlformats.org/drawingml/2006/main">
+            <a:off x="971550" y="2124075"/>
+            <a:ext cx="38100" cy="3524250"/>
+          </a:xfrm>
+          <a:prstGeom xmlns:a="http://schemas.openxmlformats.org/drawingml/2006/main" prst="rect">
             <a:avLst/>
           </a:prstGeom>
           <a:solidFill xmlns:a="http://schemas.openxmlformats.org/drawingml/2006/main">
-            <a:srgbClr val="18324A"/>
+            <a:srgbClr val="2C6E73"/>
           </a:solidFill>
           <a:ln xmlns:a="http://schemas.openxmlformats.org/drawingml/2006/main" w="0">
-            <a:noFill/>
+            <a:solidFill>
+              <a:srgbClr val="2C6E73"/>
+            </a:solidFill>
           </a:ln>
         </p:spPr>
       </p:sp>
@@ -8297,19 +8299,19 @@
           <p:cNvPr id="12" name="">
             <a:extLst xmlns:a="http://schemas.openxmlformats.org/drawingml/2006/main">
               <a:ext uri="{FF2B5EF4-FFF2-40B4-BE49-F238E27FC236}">
-                <a16:creationId xmlns:a16="http://schemas.microsoft.com/office/drawing/2014/main" id="{55B9BDCA-C39A-434D-A06D-7A583C64252A}"/>
-              </a:ext>
-            </a:extLst>
-          </p:cNvPr>
-          <p:cNvSpPr>
-            <a:spLocks xmlns:a="http://schemas.openxmlformats.org/drawingml/2006/main" noGrp="1"/>
-          </p:cNvSpPr>
-          <p:nvPr/>
-        </p:nvSpPr>
-        <p:spPr>
-          <a:xfrm xmlns:a="http://schemas.openxmlformats.org/drawingml/2006/main">
-            <a:off x="1000125" y="2276475"/>
-            <a:ext cx="476250" cy="419100"/>
+                <a16:creationId xmlns:a16="http://schemas.microsoft.com/office/drawing/2014/main" id="{DE7F3560-6CCB-4752-B362-71B9B19A7D79}"/>
+              </a:ext>
+            </a:extLst>
+          </p:cNvPr>
+          <p:cNvSpPr>
+            <a:spLocks xmlns:a="http://schemas.openxmlformats.org/drawingml/2006/main" noGrp="1"/>
+          </p:cNvSpPr>
+          <p:nvPr/>
+        </p:nvSpPr>
+        <p:spPr>
+          <a:xfrm xmlns:a="http://schemas.openxmlformats.org/drawingml/2006/main">
+            <a:off x="1162050" y="2200275"/>
+            <a:ext cx="400050" cy="400050"/>
           </a:xfrm>
           <a:prstGeom xmlns:a="http://schemas.openxmlformats.org/drawingml/2006/main" prst="rect">
             <a:avLst/>
@@ -8326,9 +8328,9 @@
           <a:lstStyle xmlns:a="http://schemas.openxmlformats.org/drawingml/2006/main"/>
           <a:p xmlns:a="http://schemas.openxmlformats.org/drawingml/2006/main">
             <a:pPr algn="ctr">
-              <a:defRPr sz="1350" b="1">
-                <a:solidFill>
-                  <a:srgbClr val="FFFFFF"/>
+              <a:defRPr sz="1125" b="1">
+                <a:solidFill>
+                  <a:srgbClr val="2C6E73"/>
                 </a:solidFill>
                 <a:latin typeface="Arial"/>
                 <a:ea typeface="Arial"/>
@@ -8336,9 +8338,9 @@
               </a:defRPr>
             </a:pPr>
             <a:r>
-              <a:rPr sz="1350" b="1">
-                <a:solidFill>
-                  <a:srgbClr val="FFFFFF"/>
+              <a:rPr sz="1125" b="1">
+                <a:solidFill>
+                  <a:srgbClr val="2C6E73"/>
                 </a:solidFill>
                 <a:latin typeface="Arial"/>
                 <a:ea typeface="Arial"/>
@@ -8354,19 +8356,19 @@
           <p:cNvPr id="13" name="">
             <a:extLst xmlns:a="http://schemas.openxmlformats.org/drawingml/2006/main">
               <a:ext uri="{FF2B5EF4-FFF2-40B4-BE49-F238E27FC236}">
-                <a16:creationId xmlns:a16="http://schemas.microsoft.com/office/drawing/2014/main" id="{4F5A697E-25DD-4AAF-AF3A-3AEA757AF8B6}"/>
-              </a:ext>
-            </a:extLst>
-          </p:cNvPr>
-          <p:cNvSpPr>
-            <a:spLocks xmlns:a="http://schemas.openxmlformats.org/drawingml/2006/main" noGrp="1"/>
-          </p:cNvSpPr>
-          <p:nvPr/>
-        </p:nvSpPr>
-        <p:spPr>
-          <a:xfrm xmlns:a="http://schemas.openxmlformats.org/drawingml/2006/main">
-            <a:off x="1714500" y="2181225"/>
-            <a:ext cx="9429750" cy="609600"/>
+                <a16:creationId xmlns:a16="http://schemas.microsoft.com/office/drawing/2014/main" id="{BDCFFFC1-752E-4E15-B5AD-718994C194A3}"/>
+              </a:ext>
+            </a:extLst>
+          </p:cNvPr>
+          <p:cNvSpPr>
+            <a:spLocks xmlns:a="http://schemas.openxmlformats.org/drawingml/2006/main" noGrp="1"/>
+          </p:cNvSpPr>
+          <p:nvPr/>
+        </p:nvSpPr>
+        <p:spPr>
+          <a:xfrm xmlns:a="http://schemas.openxmlformats.org/drawingml/2006/main">
+            <a:off x="1714500" y="2114550"/>
+            <a:ext cx="9525000" cy="809625"/>
           </a:xfrm>
           <a:prstGeom xmlns:a="http://schemas.openxmlformats.org/drawingml/2006/main" prst="rect">
             <a:avLst/>
@@ -8383,7 +8385,7 @@
           <a:lstStyle xmlns:a="http://schemas.openxmlformats.org/drawingml/2006/main"/>
           <a:p xmlns:a="http://schemas.openxmlformats.org/drawingml/2006/main">
             <a:pPr algn="l">
-              <a:defRPr sz="1500" b="0">
+              <a:defRPr sz="1725" b="0">
                 <a:solidFill>
                   <a:srgbClr val="17253A"/>
                 </a:solidFill>
@@ -8393,7 +8395,7 @@
               </a:defRPr>
             </a:pPr>
             <a:r>
-              <a:rPr sz="1500" b="0">
+              <a:rPr sz="1725" b="0">
                 <a:solidFill>
                   <a:srgbClr val="17253A"/>
                 </a:solidFill>
@@ -8401,7 +8403,7 @@
                 <a:ea typeface="Arial"/>
                 <a:cs typeface="Arial"/>
               </a:rPr>
-              <a:t>Identify the structure: Keep both sides balanced and identify the outer operation.</a:t>
+              <a:t>5x - 7 = 48</a:t>
             </a:r>
           </a:p>
         </p:txBody>
@@ -8411,28 +8413,30 @@
           <p:cNvPr id="14" name="">
             <a:extLst xmlns:a="http://schemas.openxmlformats.org/drawingml/2006/main">
               <a:ext uri="{FF2B5EF4-FFF2-40B4-BE49-F238E27FC236}">
-                <a16:creationId xmlns:a16="http://schemas.microsoft.com/office/drawing/2014/main" id="{6146E8FC-E153-4E60-A40A-AA5F444918BA}"/>
-              </a:ext>
-            </a:extLst>
-          </p:cNvPr>
-          <p:cNvSpPr>
-            <a:spLocks xmlns:a="http://schemas.openxmlformats.org/drawingml/2006/main" noGrp="1"/>
-          </p:cNvSpPr>
-          <p:nvPr/>
-        </p:nvSpPr>
-        <p:spPr>
-          <a:xfrm xmlns:a="http://schemas.openxmlformats.org/drawingml/2006/main">
-            <a:off x="1000125" y="2990850"/>
-            <a:ext cx="476250" cy="476250"/>
-          </a:xfrm>
-          <a:prstGeom xmlns:a="http://schemas.openxmlformats.org/drawingml/2006/main" prst="ellipse">
+                <a16:creationId xmlns:a16="http://schemas.microsoft.com/office/drawing/2014/main" id="{FF4C5AA1-6B1A-4CD6-8A21-59DE140F0B0C}"/>
+              </a:ext>
+            </a:extLst>
+          </p:cNvPr>
+          <p:cNvSpPr>
+            <a:spLocks xmlns:a="http://schemas.openxmlformats.org/drawingml/2006/main" noGrp="1"/>
+          </p:cNvSpPr>
+          <p:nvPr/>
+        </p:nvSpPr>
+        <p:spPr>
+          <a:xfrm xmlns:a="http://schemas.openxmlformats.org/drawingml/2006/main">
+            <a:off x="1714500" y="2943225"/>
+            <a:ext cx="9334500" cy="9525"/>
+          </a:xfrm>
+          <a:prstGeom xmlns:a="http://schemas.openxmlformats.org/drawingml/2006/main" prst="rect">
             <a:avLst/>
           </a:prstGeom>
           <a:solidFill xmlns:a="http://schemas.openxmlformats.org/drawingml/2006/main">
-            <a:srgbClr val="2C6E73"/>
+            <a:srgbClr val="D9E0E6"/>
           </a:solidFill>
           <a:ln xmlns:a="http://schemas.openxmlformats.org/drawingml/2006/main" w="0">
-            <a:noFill/>
+            <a:solidFill>
+              <a:srgbClr val="D9E0E6"/>
+            </a:solidFill>
           </a:ln>
         </p:spPr>
       </p:sp>
@@ -8441,19 +8445,19 @@
           <p:cNvPr id="15" name="">
             <a:extLst xmlns:a="http://schemas.openxmlformats.org/drawingml/2006/main">
               <a:ext uri="{FF2B5EF4-FFF2-40B4-BE49-F238E27FC236}">
-                <a16:creationId xmlns:a16="http://schemas.microsoft.com/office/drawing/2014/main" id="{7760E539-EF3B-4F07-B0D6-71CE0D918928}"/>
-              </a:ext>
-            </a:extLst>
-          </p:cNvPr>
-          <p:cNvSpPr>
-            <a:spLocks xmlns:a="http://schemas.openxmlformats.org/drawingml/2006/main" noGrp="1"/>
-          </p:cNvSpPr>
-          <p:nvPr/>
-        </p:nvSpPr>
-        <p:spPr>
-          <a:xfrm xmlns:a="http://schemas.openxmlformats.org/drawingml/2006/main">
-            <a:off x="1000125" y="3019425"/>
-            <a:ext cx="476250" cy="419100"/>
+                <a16:creationId xmlns:a16="http://schemas.microsoft.com/office/drawing/2014/main" id="{7895D53C-5102-4885-9FFA-BAB76A2666F6}"/>
+              </a:ext>
+            </a:extLst>
+          </p:cNvPr>
+          <p:cNvSpPr>
+            <a:spLocks xmlns:a="http://schemas.openxmlformats.org/drawingml/2006/main" noGrp="1"/>
+          </p:cNvSpPr>
+          <p:nvPr/>
+        </p:nvSpPr>
+        <p:spPr>
+          <a:xfrm xmlns:a="http://schemas.openxmlformats.org/drawingml/2006/main">
+            <a:off x="1162050" y="3076575"/>
+            <a:ext cx="400050" cy="400050"/>
           </a:xfrm>
           <a:prstGeom xmlns:a="http://schemas.openxmlformats.org/drawingml/2006/main" prst="rect">
             <a:avLst/>
@@ -8470,9 +8474,9 @@
           <a:lstStyle xmlns:a="http://schemas.openxmlformats.org/drawingml/2006/main"/>
           <a:p xmlns:a="http://schemas.openxmlformats.org/drawingml/2006/main">
             <a:pPr algn="ctr">
-              <a:defRPr sz="1350" b="1">
-                <a:solidFill>
-                  <a:srgbClr val="FFFFFF"/>
+              <a:defRPr sz="1125" b="1">
+                <a:solidFill>
+                  <a:srgbClr val="2C6E73"/>
                 </a:solidFill>
                 <a:latin typeface="Arial"/>
                 <a:ea typeface="Arial"/>
@@ -8480,9 +8484,9 @@
               </a:defRPr>
             </a:pPr>
             <a:r>
-              <a:rPr sz="1350" b="1">
-                <a:solidFill>
-                  <a:srgbClr val="FFFFFF"/>
+              <a:rPr sz="1125" b="1">
+                <a:solidFill>
+                  <a:srgbClr val="2C6E73"/>
                 </a:solidFill>
                 <a:latin typeface="Arial"/>
                 <a:ea typeface="Arial"/>
@@ -8498,19 +8502,19 @@
           <p:cNvPr id="16" name="">
             <a:extLst xmlns:a="http://schemas.openxmlformats.org/drawingml/2006/main">
               <a:ext uri="{FF2B5EF4-FFF2-40B4-BE49-F238E27FC236}">
-                <a16:creationId xmlns:a16="http://schemas.microsoft.com/office/drawing/2014/main" id="{AE3E378E-1F68-4E24-9460-3E4E6D43D4DF}"/>
-              </a:ext>
-            </a:extLst>
-          </p:cNvPr>
-          <p:cNvSpPr>
-            <a:spLocks xmlns:a="http://schemas.openxmlformats.org/drawingml/2006/main" noGrp="1"/>
-          </p:cNvSpPr>
-          <p:nvPr/>
-        </p:nvSpPr>
-        <p:spPr>
-          <a:xfrm xmlns:a="http://schemas.openxmlformats.org/drawingml/2006/main">
-            <a:off x="1714500" y="2924175"/>
-            <a:ext cx="9429750" cy="609600"/>
+                <a16:creationId xmlns:a16="http://schemas.microsoft.com/office/drawing/2014/main" id="{0B339086-F1A6-454A-86D0-3D6D4167F486}"/>
+              </a:ext>
+            </a:extLst>
+          </p:cNvPr>
+          <p:cNvSpPr>
+            <a:spLocks xmlns:a="http://schemas.openxmlformats.org/drawingml/2006/main" noGrp="1"/>
+          </p:cNvSpPr>
+          <p:nvPr/>
+        </p:nvSpPr>
+        <p:spPr>
+          <a:xfrm xmlns:a="http://schemas.openxmlformats.org/drawingml/2006/main">
+            <a:off x="1714500" y="2990850"/>
+            <a:ext cx="9525000" cy="809625"/>
           </a:xfrm>
           <a:prstGeom xmlns:a="http://schemas.openxmlformats.org/drawingml/2006/main" prst="rect">
             <a:avLst/>
@@ -8527,7 +8531,7 @@
           <a:lstStyle xmlns:a="http://schemas.openxmlformats.org/drawingml/2006/main"/>
           <a:p xmlns:a="http://schemas.openxmlformats.org/drawingml/2006/main">
             <a:pPr algn="l">
-              <a:defRPr sz="1500" b="0">
+              <a:defRPr sz="1725" b="0">
                 <a:solidFill>
                   <a:srgbClr val="17253A"/>
                 </a:solidFill>
@@ -8537,7 +8541,7 @@
               </a:defRPr>
             </a:pPr>
             <a:r>
-              <a:rPr sz="1500" b="0">
+              <a:rPr sz="1725" b="0">
                 <a:solidFill>
                   <a:srgbClr val="17253A"/>
                 </a:solidFill>
@@ -8545,7 +8549,7 @@
                 <a:ea typeface="Arial"/>
                 <a:cs typeface="Arial"/>
               </a:rPr>
-              <a:t>Set up the method: Undo operations in reverse order.</a:t>
+              <a:t>Add 7 to both sides: 5x = 55</a:t>
             </a:r>
           </a:p>
         </p:txBody>
@@ -8555,28 +8559,30 @@
           <p:cNvPr id="17" name="">
             <a:extLst xmlns:a="http://schemas.openxmlformats.org/drawingml/2006/main">
               <a:ext uri="{FF2B5EF4-FFF2-40B4-BE49-F238E27FC236}">
-                <a16:creationId xmlns:a16="http://schemas.microsoft.com/office/drawing/2014/main" id="{C02513B3-C342-4B0D-92F8-B09812E0CE21}"/>
-              </a:ext>
-            </a:extLst>
-          </p:cNvPr>
-          <p:cNvSpPr>
-            <a:spLocks xmlns:a="http://schemas.openxmlformats.org/drawingml/2006/main" noGrp="1"/>
-          </p:cNvSpPr>
-          <p:nvPr/>
-        </p:nvSpPr>
-        <p:spPr>
-          <a:xfrm xmlns:a="http://schemas.openxmlformats.org/drawingml/2006/main">
-            <a:off x="1000125" y="3733800"/>
-            <a:ext cx="476250" cy="476250"/>
-          </a:xfrm>
-          <a:prstGeom xmlns:a="http://schemas.openxmlformats.org/drawingml/2006/main" prst="ellipse">
+                <a16:creationId xmlns:a16="http://schemas.microsoft.com/office/drawing/2014/main" id="{496ACCCB-C305-4F71-86CA-5DD0108ECE40}"/>
+              </a:ext>
+            </a:extLst>
+          </p:cNvPr>
+          <p:cNvSpPr>
+            <a:spLocks xmlns:a="http://schemas.openxmlformats.org/drawingml/2006/main" noGrp="1"/>
+          </p:cNvSpPr>
+          <p:nvPr/>
+        </p:nvSpPr>
+        <p:spPr>
+          <a:xfrm xmlns:a="http://schemas.openxmlformats.org/drawingml/2006/main">
+            <a:off x="1714500" y="3819525"/>
+            <a:ext cx="9334500" cy="9525"/>
+          </a:xfrm>
+          <a:prstGeom xmlns:a="http://schemas.openxmlformats.org/drawingml/2006/main" prst="rect">
             <a:avLst/>
           </a:prstGeom>
           <a:solidFill xmlns:a="http://schemas.openxmlformats.org/drawingml/2006/main">
-            <a:srgbClr val="2C6E73"/>
+            <a:srgbClr val="D9E0E6"/>
           </a:solidFill>
           <a:ln xmlns:a="http://schemas.openxmlformats.org/drawingml/2006/main" w="0">
-            <a:noFill/>
+            <a:solidFill>
+              <a:srgbClr val="D9E0E6"/>
+            </a:solidFill>
           </a:ln>
         </p:spPr>
       </p:sp>
@@ -8585,19 +8591,19 @@
           <p:cNvPr id="18" name="">
             <a:extLst xmlns:a="http://schemas.openxmlformats.org/drawingml/2006/main">
               <a:ext uri="{FF2B5EF4-FFF2-40B4-BE49-F238E27FC236}">
-                <a16:creationId xmlns:a16="http://schemas.microsoft.com/office/drawing/2014/main" id="{F535DCCD-E574-4540-9B52-F46AC040A419}"/>
-              </a:ext>
-            </a:extLst>
-          </p:cNvPr>
-          <p:cNvSpPr>
-            <a:spLocks xmlns:a="http://schemas.openxmlformats.org/drawingml/2006/main" noGrp="1"/>
-          </p:cNvSpPr>
-          <p:nvPr/>
-        </p:nvSpPr>
-        <p:spPr>
-          <a:xfrm xmlns:a="http://schemas.openxmlformats.org/drawingml/2006/main">
-            <a:off x="1000125" y="3762375"/>
-            <a:ext cx="476250" cy="419100"/>
+                <a16:creationId xmlns:a16="http://schemas.microsoft.com/office/drawing/2014/main" id="{AB5860E3-1E28-4F77-B082-81F98868FA6C}"/>
+              </a:ext>
+            </a:extLst>
+          </p:cNvPr>
+          <p:cNvSpPr>
+            <a:spLocks xmlns:a="http://schemas.openxmlformats.org/drawingml/2006/main" noGrp="1"/>
+          </p:cNvSpPr>
+          <p:nvPr/>
+        </p:nvSpPr>
+        <p:spPr>
+          <a:xfrm xmlns:a="http://schemas.openxmlformats.org/drawingml/2006/main">
+            <a:off x="1162050" y="3952875"/>
+            <a:ext cx="400050" cy="400050"/>
           </a:xfrm>
           <a:prstGeom xmlns:a="http://schemas.openxmlformats.org/drawingml/2006/main" prst="rect">
             <a:avLst/>
@@ -8614,9 +8620,9 @@
           <a:lstStyle xmlns:a="http://schemas.openxmlformats.org/drawingml/2006/main"/>
           <a:p xmlns:a="http://schemas.openxmlformats.org/drawingml/2006/main">
             <a:pPr algn="ctr">
-              <a:defRPr sz="1350" b="1">
-                <a:solidFill>
-                  <a:srgbClr val="FFFFFF"/>
+              <a:defRPr sz="1125" b="1">
+                <a:solidFill>
+                  <a:srgbClr val="2C6E73"/>
                 </a:solidFill>
                 <a:latin typeface="Arial"/>
                 <a:ea typeface="Arial"/>
@@ -8624,9 +8630,9 @@
               </a:defRPr>
             </a:pPr>
             <a:r>
-              <a:rPr sz="1350" b="1">
-                <a:solidFill>
-                  <a:srgbClr val="FFFFFF"/>
+              <a:rPr sz="1125" b="1">
+                <a:solidFill>
+                  <a:srgbClr val="2C6E73"/>
                 </a:solidFill>
                 <a:latin typeface="Arial"/>
                 <a:ea typeface="Arial"/>
@@ -8642,19 +8648,19 @@
           <p:cNvPr id="19" name="">
             <a:extLst xmlns:a="http://schemas.openxmlformats.org/drawingml/2006/main">
               <a:ext uri="{FF2B5EF4-FFF2-40B4-BE49-F238E27FC236}">
-                <a16:creationId xmlns:a16="http://schemas.microsoft.com/office/drawing/2014/main" id="{0949DA43-8F7D-4431-831C-5624676F61A4}"/>
-              </a:ext>
-            </a:extLst>
-          </p:cNvPr>
-          <p:cNvSpPr>
-            <a:spLocks xmlns:a="http://schemas.openxmlformats.org/drawingml/2006/main" noGrp="1"/>
-          </p:cNvSpPr>
-          <p:nvPr/>
-        </p:nvSpPr>
-        <p:spPr>
-          <a:xfrm xmlns:a="http://schemas.openxmlformats.org/drawingml/2006/main">
-            <a:off x="1714500" y="3667125"/>
-            <a:ext cx="9429750" cy="609600"/>
+                <a16:creationId xmlns:a16="http://schemas.microsoft.com/office/drawing/2014/main" id="{9140F761-86BF-41DC-9E66-BEBC73B4E5E3}"/>
+              </a:ext>
+            </a:extLst>
+          </p:cNvPr>
+          <p:cNvSpPr>
+            <a:spLocks xmlns:a="http://schemas.openxmlformats.org/drawingml/2006/main" noGrp="1"/>
+          </p:cNvSpPr>
+          <p:nvPr/>
+        </p:nvSpPr>
+        <p:spPr>
+          <a:xfrm xmlns:a="http://schemas.openxmlformats.org/drawingml/2006/main">
+            <a:off x="1714500" y="3867150"/>
+            <a:ext cx="9525000" cy="809625"/>
           </a:xfrm>
           <a:prstGeom xmlns:a="http://schemas.openxmlformats.org/drawingml/2006/main" prst="rect">
             <a:avLst/>
@@ -8671,7 +8677,7 @@
           <a:lstStyle xmlns:a="http://schemas.openxmlformats.org/drawingml/2006/main"/>
           <a:p xmlns:a="http://schemas.openxmlformats.org/drawingml/2006/main">
             <a:pPr algn="l">
-              <a:defRPr sz="1500" b="0">
+              <a:defRPr sz="1725" b="0">
                 <a:solidFill>
                   <a:srgbClr val="17253A"/>
                 </a:solidFill>
@@ -8681,7 +8687,7 @@
               </a:defRPr>
             </a:pPr>
             <a:r>
-              <a:rPr sz="1500" b="0">
+              <a:rPr sz="1725" b="0">
                 <a:solidFill>
                   <a:srgbClr val="17253A"/>
                 </a:solidFill>
@@ -8689,7 +8695,7 @@
                 <a:ea typeface="Arial"/>
                 <a:cs typeface="Arial"/>
               </a:rPr>
-              <a:t>Complete the calculation: x = 11.</a:t>
+              <a:t>Divide both sides by 5</a:t>
             </a:r>
           </a:p>
         </p:txBody>
@@ -8699,28 +8705,30 @@
           <p:cNvPr id="20" name="">
             <a:extLst xmlns:a="http://schemas.openxmlformats.org/drawingml/2006/main">
               <a:ext uri="{FF2B5EF4-FFF2-40B4-BE49-F238E27FC236}">
-                <a16:creationId xmlns:a16="http://schemas.microsoft.com/office/drawing/2014/main" id="{EDD2DE89-BFC3-458E-99DC-4B2888AE7758}"/>
-              </a:ext>
-            </a:extLst>
-          </p:cNvPr>
-          <p:cNvSpPr>
-            <a:spLocks xmlns:a="http://schemas.openxmlformats.org/drawingml/2006/main" noGrp="1"/>
-          </p:cNvSpPr>
-          <p:nvPr/>
-        </p:nvSpPr>
-        <p:spPr>
-          <a:xfrm xmlns:a="http://schemas.openxmlformats.org/drawingml/2006/main">
-            <a:off x="1000125" y="4476750"/>
-            <a:ext cx="476250" cy="476250"/>
-          </a:xfrm>
-          <a:prstGeom xmlns:a="http://schemas.openxmlformats.org/drawingml/2006/main" prst="ellipse">
+                <a16:creationId xmlns:a16="http://schemas.microsoft.com/office/drawing/2014/main" id="{84D13AD0-4AAE-4837-81E4-F4E704B1B945}"/>
+              </a:ext>
+            </a:extLst>
+          </p:cNvPr>
+          <p:cNvSpPr>
+            <a:spLocks xmlns:a="http://schemas.openxmlformats.org/drawingml/2006/main" noGrp="1"/>
+          </p:cNvSpPr>
+          <p:nvPr/>
+        </p:nvSpPr>
+        <p:spPr>
+          <a:xfrm xmlns:a="http://schemas.openxmlformats.org/drawingml/2006/main">
+            <a:off x="1714500" y="4695825"/>
+            <a:ext cx="9334500" cy="9525"/>
+          </a:xfrm>
+          <a:prstGeom xmlns:a="http://schemas.openxmlformats.org/drawingml/2006/main" prst="rect">
             <a:avLst/>
           </a:prstGeom>
           <a:solidFill xmlns:a="http://schemas.openxmlformats.org/drawingml/2006/main">
-            <a:srgbClr val="2C6E73"/>
+            <a:srgbClr val="D9E0E6"/>
           </a:solidFill>
           <a:ln xmlns:a="http://schemas.openxmlformats.org/drawingml/2006/main" w="0">
-            <a:noFill/>
+            <a:solidFill>
+              <a:srgbClr val="D9E0E6"/>
+            </a:solidFill>
           </a:ln>
         </p:spPr>
       </p:sp>
@@ -8729,19 +8737,19 @@
           <p:cNvPr id="21" name="">
             <a:extLst xmlns:a="http://schemas.openxmlformats.org/drawingml/2006/main">
               <a:ext uri="{FF2B5EF4-FFF2-40B4-BE49-F238E27FC236}">
-                <a16:creationId xmlns:a16="http://schemas.microsoft.com/office/drawing/2014/main" id="{90B0ACFC-73FC-48C1-9F2D-1C4E36E00E05}"/>
-              </a:ext>
-            </a:extLst>
-          </p:cNvPr>
-          <p:cNvSpPr>
-            <a:spLocks xmlns:a="http://schemas.openxmlformats.org/drawingml/2006/main" noGrp="1"/>
-          </p:cNvSpPr>
-          <p:nvPr/>
-        </p:nvSpPr>
-        <p:spPr>
-          <a:xfrm xmlns:a="http://schemas.openxmlformats.org/drawingml/2006/main">
-            <a:off x="1000125" y="4505325"/>
-            <a:ext cx="476250" cy="419100"/>
+                <a16:creationId xmlns:a16="http://schemas.microsoft.com/office/drawing/2014/main" id="{94C32A86-F84A-49F9-ADB0-4604AE6F1DB3}"/>
+              </a:ext>
+            </a:extLst>
+          </p:cNvPr>
+          <p:cNvSpPr>
+            <a:spLocks xmlns:a="http://schemas.openxmlformats.org/drawingml/2006/main" noGrp="1"/>
+          </p:cNvSpPr>
+          <p:nvPr/>
+        </p:nvSpPr>
+        <p:spPr>
+          <a:xfrm xmlns:a="http://schemas.openxmlformats.org/drawingml/2006/main">
+            <a:off x="1162050" y="4829175"/>
+            <a:ext cx="400050" cy="400050"/>
           </a:xfrm>
           <a:prstGeom xmlns:a="http://schemas.openxmlformats.org/drawingml/2006/main" prst="rect">
             <a:avLst/>
@@ -8758,9 +8766,9 @@
           <a:lstStyle xmlns:a="http://schemas.openxmlformats.org/drawingml/2006/main"/>
           <a:p xmlns:a="http://schemas.openxmlformats.org/drawingml/2006/main">
             <a:pPr algn="ctr">
-              <a:defRPr sz="1350" b="1">
-                <a:solidFill>
-                  <a:srgbClr val="FFFFFF"/>
+              <a:defRPr sz="1125" b="1">
+                <a:solidFill>
+                  <a:srgbClr val="2F785D"/>
                 </a:solidFill>
                 <a:latin typeface="Arial"/>
                 <a:ea typeface="Arial"/>
@@ -8768,9 +8776,9 @@
               </a:defRPr>
             </a:pPr>
             <a:r>
-              <a:rPr sz="1350" b="1">
-                <a:solidFill>
-                  <a:srgbClr val="FFFFFF"/>
+              <a:rPr sz="1125" b="1">
+                <a:solidFill>
+                  <a:srgbClr val="2F785D"/>
                 </a:solidFill>
                 <a:latin typeface="Arial"/>
                 <a:ea typeface="Arial"/>
@@ -8786,19 +8794,19 @@
           <p:cNvPr id="22" name="">
             <a:extLst xmlns:a="http://schemas.openxmlformats.org/drawingml/2006/main">
               <a:ext uri="{FF2B5EF4-FFF2-40B4-BE49-F238E27FC236}">
-                <a16:creationId xmlns:a16="http://schemas.microsoft.com/office/drawing/2014/main" id="{CD3D593B-9DF8-48CE-B45B-6483E9CB3473}"/>
-              </a:ext>
-            </a:extLst>
-          </p:cNvPr>
-          <p:cNvSpPr>
-            <a:spLocks xmlns:a="http://schemas.openxmlformats.org/drawingml/2006/main" noGrp="1"/>
-          </p:cNvSpPr>
-          <p:nvPr/>
-        </p:nvSpPr>
-        <p:spPr>
-          <a:xfrm xmlns:a="http://schemas.openxmlformats.org/drawingml/2006/main">
-            <a:off x="1714500" y="4410075"/>
-            <a:ext cx="9429750" cy="609600"/>
+                <a16:creationId xmlns:a16="http://schemas.microsoft.com/office/drawing/2014/main" id="{099914C8-1327-4852-9F53-CE087AF3281D}"/>
+              </a:ext>
+            </a:extLst>
+          </p:cNvPr>
+          <p:cNvSpPr>
+            <a:spLocks xmlns:a="http://schemas.openxmlformats.org/drawingml/2006/main" noGrp="1"/>
+          </p:cNvSpPr>
+          <p:nvPr/>
+        </p:nvSpPr>
+        <p:spPr>
+          <a:xfrm xmlns:a="http://schemas.openxmlformats.org/drawingml/2006/main">
+            <a:off x="1714500" y="4743450"/>
+            <a:ext cx="9525000" cy="809625"/>
           </a:xfrm>
           <a:prstGeom xmlns:a="http://schemas.openxmlformats.org/drawingml/2006/main" prst="rect">
             <a:avLst/>
@@ -8815,7 +8823,7 @@
           <a:lstStyle xmlns:a="http://schemas.openxmlformats.org/drawingml/2006/main"/>
           <a:p xmlns:a="http://schemas.openxmlformats.org/drawingml/2006/main">
             <a:pPr algn="l">
-              <a:defRPr sz="1500" b="1">
+              <a:defRPr sz="1725" b="1">
                 <a:solidFill>
                   <a:srgbClr val="2F785D"/>
                 </a:solidFill>
@@ -8825,7 +8833,7 @@
               </a:defRPr>
             </a:pPr>
             <a:r>
-              <a:rPr sz="1500" b="1">
+              <a:rPr sz="1725" b="1">
                 <a:solidFill>
                   <a:srgbClr val="2F785D"/>
                 </a:solidFill>
@@ -8833,7 +8841,7 @@
                 <a:ea typeface="Arial"/>
                 <a:cs typeface="Arial"/>
               </a:rPr>
-              <a:t>Check the result: Substitute the solution to check the original equation.</a:t>
+              <a:t>x = 11</a:t>
             </a:r>
           </a:p>
         </p:txBody>
@@ -8841,7 +8849,7 @@
     </p:spTree>
     <p:extLst>
       <p:ext uri="{BB962C8B-B14F-4D97-AF65-F5344CB8AC3E}">
-        <p14:creationId xmlns:p14="http://schemas.microsoft.com/office/powerpoint/2010/main" val="1575094407"/>
+        <p14:creationId xmlns:p14="http://schemas.microsoft.com/office/powerpoint/2010/main" val="953145097"/>
       </p:ext>
     </p:extLst>
   </p:cSld>
@@ -9134,7 +9142,7 @@
           <p:cNvPr id="15" name="">
             <a:extLst xmlns:a="http://schemas.openxmlformats.org/drawingml/2006/main">
               <a:ext uri="{FF2B5EF4-FFF2-40B4-BE49-F238E27FC236}">
-                <a16:creationId xmlns:a16="http://schemas.microsoft.com/office/drawing/2014/main" id="{66CCB2B0-011F-4A33-80D2-834A7960C7AF}"/>
+                <a16:creationId xmlns:a16="http://schemas.microsoft.com/office/drawing/2014/main" id="{5742081B-2045-43FB-89B9-1CB8CF2801B1}"/>
               </a:ext>
             </a:extLst>
           </p:cNvPr>
@@ -9166,7 +9174,7 @@
           <p:cNvPr id="2" name="">
             <a:extLst xmlns:a="http://schemas.openxmlformats.org/drawingml/2006/main">
               <a:ext uri="{FF2B5EF4-FFF2-40B4-BE49-F238E27FC236}">
-                <a16:creationId xmlns:a16="http://schemas.microsoft.com/office/drawing/2014/main" id="{7E29FE80-224E-4450-B51E-B6EA5FA102B6}"/>
+                <a16:creationId xmlns:a16="http://schemas.microsoft.com/office/drawing/2014/main" id="{923AF1D2-4303-4929-AAFB-C2DC453300E6}"/>
               </a:ext>
             </a:extLst>
           </p:cNvPr>
@@ -9223,7 +9231,7 @@
           <p:cNvPr id="3" name="">
             <a:extLst xmlns:a="http://schemas.openxmlformats.org/drawingml/2006/main">
               <a:ext uri="{FF2B5EF4-FFF2-40B4-BE49-F238E27FC236}">
-                <a16:creationId xmlns:a16="http://schemas.microsoft.com/office/drawing/2014/main" id="{73213BB0-679B-4550-A7E0-3A318D922296}"/>
+                <a16:creationId xmlns:a16="http://schemas.microsoft.com/office/drawing/2014/main" id="{63FF1228-6FD8-425F-B103-5B069131B15C}"/>
               </a:ext>
             </a:extLst>
           </p:cNvPr>
@@ -9255,7 +9263,7 @@
           <p:cNvPr id="4" name="">
             <a:extLst xmlns:a="http://schemas.openxmlformats.org/drawingml/2006/main">
               <a:ext uri="{FF2B5EF4-FFF2-40B4-BE49-F238E27FC236}">
-                <a16:creationId xmlns:a16="http://schemas.microsoft.com/office/drawing/2014/main" id="{7C447920-D63B-4A65-8DB0-8A6BA4C44281}"/>
+                <a16:creationId xmlns:a16="http://schemas.microsoft.com/office/drawing/2014/main" id="{51C68EAB-D1CE-4372-B0CE-49A6015D3EF3}"/>
               </a:ext>
             </a:extLst>
           </p:cNvPr>
@@ -9312,7 +9320,7 @@
           <p:cNvPr id="5" name="">
             <a:extLst xmlns:a="http://schemas.openxmlformats.org/drawingml/2006/main">
               <a:ext uri="{FF2B5EF4-FFF2-40B4-BE49-F238E27FC236}">
-                <a16:creationId xmlns:a16="http://schemas.microsoft.com/office/drawing/2014/main" id="{B8D835AB-97C3-45C9-AE52-B313BEE21962}"/>
+                <a16:creationId xmlns:a16="http://schemas.microsoft.com/office/drawing/2014/main" id="{B82BCB26-52C9-450F-9B51-919D7E4F1729}"/>
               </a:ext>
             </a:extLst>
           </p:cNvPr>
@@ -9369,7 +9377,7 @@
           <p:cNvPr id="6" name="">
             <a:extLst xmlns:a="http://schemas.openxmlformats.org/drawingml/2006/main">
               <a:ext uri="{FF2B5EF4-FFF2-40B4-BE49-F238E27FC236}">
-                <a16:creationId xmlns:a16="http://schemas.microsoft.com/office/drawing/2014/main" id="{3C785581-02B4-4984-AFF1-8619258AEAA4}"/>
+                <a16:creationId xmlns:a16="http://schemas.microsoft.com/office/drawing/2014/main" id="{3A03EAEA-7311-4CAD-A721-6B7994E6BB04}"/>
               </a:ext>
             </a:extLst>
           </p:cNvPr>
@@ -9426,7 +9434,7 @@
           <p:cNvPr id="7" name="">
             <a:extLst xmlns:a="http://schemas.openxmlformats.org/drawingml/2006/main">
               <a:ext uri="{FF2B5EF4-FFF2-40B4-BE49-F238E27FC236}">
-                <a16:creationId xmlns:a16="http://schemas.microsoft.com/office/drawing/2014/main" id="{5BDE8B79-DBFC-46F0-BD28-C5B8F96F0347}"/>
+                <a16:creationId xmlns:a16="http://schemas.microsoft.com/office/drawing/2014/main" id="{818B605F-4AA0-4F30-97BB-4D2E970F8DA6}"/>
               </a:ext>
             </a:extLst>
           </p:cNvPr>
@@ -9458,7 +9466,7 @@
           <p:cNvPr id="8" name="">
             <a:extLst xmlns:a="http://schemas.openxmlformats.org/drawingml/2006/main">
               <a:ext uri="{FF2B5EF4-FFF2-40B4-BE49-F238E27FC236}">
-                <a16:creationId xmlns:a16="http://schemas.microsoft.com/office/drawing/2014/main" id="{234BC466-D79B-4563-AA0E-CA1A8687938E}"/>
+                <a16:creationId xmlns:a16="http://schemas.microsoft.com/office/drawing/2014/main" id="{55F57A4B-B7C4-480F-9BFE-D259E0070983}"/>
               </a:ext>
             </a:extLst>
           </p:cNvPr>
@@ -9515,7 +9523,7 @@
           <p:cNvPr id="9" name="">
             <a:extLst xmlns:a="http://schemas.openxmlformats.org/drawingml/2006/main">
               <a:ext uri="{FF2B5EF4-FFF2-40B4-BE49-F238E27FC236}">
-                <a16:creationId xmlns:a16="http://schemas.microsoft.com/office/drawing/2014/main" id="{67C9368A-D5CC-4F5C-81B6-3E339C127771}"/>
+                <a16:creationId xmlns:a16="http://schemas.microsoft.com/office/drawing/2014/main" id="{CE72E4E8-91F2-44C9-8A83-958EC3549DE0}"/>
               </a:ext>
             </a:extLst>
           </p:cNvPr>
@@ -9572,7 +9580,7 @@
           <p:cNvPr id="10" name="">
             <a:extLst xmlns:a="http://schemas.openxmlformats.org/drawingml/2006/main">
               <a:ext uri="{FF2B5EF4-FFF2-40B4-BE49-F238E27FC236}">
-                <a16:creationId xmlns:a16="http://schemas.microsoft.com/office/drawing/2014/main" id="{D9C45772-5E75-4F4D-80CD-18F99AB5F1F7}"/>
+                <a16:creationId xmlns:a16="http://schemas.microsoft.com/office/drawing/2014/main" id="{974AA189-B450-464D-BE53-67157E54E510}"/>
               </a:ext>
             </a:extLst>
           </p:cNvPr>
@@ -9629,7 +9637,7 @@
           <p:cNvPr id="11" name="">
             <a:extLst xmlns:a="http://schemas.openxmlformats.org/drawingml/2006/main">
               <a:ext uri="{FF2B5EF4-FFF2-40B4-BE49-F238E27FC236}">
-                <a16:creationId xmlns:a16="http://schemas.microsoft.com/office/drawing/2014/main" id="{3F3F107E-6093-4206-86DA-79BDACC9DEC4}"/>
+                <a16:creationId xmlns:a16="http://schemas.microsoft.com/office/drawing/2014/main" id="{67023057-DA2E-4C3E-B6DD-2032B5BD6797}"/>
               </a:ext>
             </a:extLst>
           </p:cNvPr>
@@ -9686,7 +9694,7 @@
           <p:cNvPr id="12" name="">
             <a:extLst xmlns:a="http://schemas.openxmlformats.org/drawingml/2006/main">
               <a:ext uri="{FF2B5EF4-FFF2-40B4-BE49-F238E27FC236}">
-                <a16:creationId xmlns:a16="http://schemas.microsoft.com/office/drawing/2014/main" id="{EF78BC91-012D-438D-9E12-7463B47C0C49}"/>
+                <a16:creationId xmlns:a16="http://schemas.microsoft.com/office/drawing/2014/main" id="{86763B94-11E2-48B1-A504-FE1D2DD8FE96}"/>
               </a:ext>
             </a:extLst>
           </p:cNvPr>
@@ -9718,7 +9726,7 @@
           <p:cNvPr id="13" name="">
             <a:extLst xmlns:a="http://schemas.openxmlformats.org/drawingml/2006/main">
               <a:ext uri="{FF2B5EF4-FFF2-40B4-BE49-F238E27FC236}">
-                <a16:creationId xmlns:a16="http://schemas.microsoft.com/office/drawing/2014/main" id="{A1245BEA-D645-47A0-AF5C-473F9E358EA4}"/>
+                <a16:creationId xmlns:a16="http://schemas.microsoft.com/office/drawing/2014/main" id="{B29207D0-1979-4B19-B05B-D9BC404D39F4}"/>
               </a:ext>
             </a:extLst>
           </p:cNvPr>
@@ -9775,7 +9783,7 @@
           <p:cNvPr id="14" name="">
             <a:extLst xmlns:a="http://schemas.openxmlformats.org/drawingml/2006/main">
               <a:ext uri="{FF2B5EF4-FFF2-40B4-BE49-F238E27FC236}">
-                <a16:creationId xmlns:a16="http://schemas.microsoft.com/office/drawing/2014/main" id="{F3E1551D-558C-40FF-BCCE-EE05FF84B0FE}"/>
+                <a16:creationId xmlns:a16="http://schemas.microsoft.com/office/drawing/2014/main" id="{5BB95541-B0E6-4D02-827F-6509491C6804}"/>
               </a:ext>
             </a:extLst>
           </p:cNvPr>
@@ -9830,7 +9838,7 @@
     </p:spTree>
     <p:extLst>
       <p:ext uri="{BB962C8B-B14F-4D97-AF65-F5344CB8AC3E}">
-        <p14:creationId xmlns:p14="http://schemas.microsoft.com/office/powerpoint/2010/main" val="1942368189"/>
+        <p14:creationId xmlns:p14="http://schemas.microsoft.com/office/powerpoint/2010/main" val="1988483422"/>
       </p:ext>
     </p:extLst>
   </p:cSld>
@@ -10031,7 +10039,7 @@
           <p:cNvPr id="16" name="">
             <a:extLst xmlns:a="http://schemas.openxmlformats.org/drawingml/2006/main">
               <a:ext uri="{FF2B5EF4-FFF2-40B4-BE49-F238E27FC236}">
-                <a16:creationId xmlns:a16="http://schemas.microsoft.com/office/drawing/2014/main" id="{576FCFCB-D236-4925-8911-6B1B448E5C6C}"/>
+                <a16:creationId xmlns:a16="http://schemas.microsoft.com/office/drawing/2014/main" id="{89D07886-6F3D-416A-8B63-31150F2EC738}"/>
               </a:ext>
             </a:extLst>
           </p:cNvPr>
@@ -10063,7 +10071,7 @@
           <p:cNvPr id="2" name="">
             <a:extLst xmlns:a="http://schemas.openxmlformats.org/drawingml/2006/main">
               <a:ext uri="{FF2B5EF4-FFF2-40B4-BE49-F238E27FC236}">
-                <a16:creationId xmlns:a16="http://schemas.microsoft.com/office/drawing/2014/main" id="{B1009C3F-C646-47DB-A61C-D20A1F2F0ECE}"/>
+                <a16:creationId xmlns:a16="http://schemas.microsoft.com/office/drawing/2014/main" id="{7F9AA8D7-9436-4F93-A38A-E334E4910E60}"/>
               </a:ext>
             </a:extLst>
           </p:cNvPr>
@@ -10120,7 +10128,7 @@
           <p:cNvPr id="3" name="">
             <a:extLst xmlns:a="http://schemas.openxmlformats.org/drawingml/2006/main">
               <a:ext uri="{FF2B5EF4-FFF2-40B4-BE49-F238E27FC236}">
-                <a16:creationId xmlns:a16="http://schemas.microsoft.com/office/drawing/2014/main" id="{1D6E6226-2094-4B6B-8DE5-F30753532D4C}"/>
+                <a16:creationId xmlns:a16="http://schemas.microsoft.com/office/drawing/2014/main" id="{6B597284-4F5C-4DB7-8EF3-157A4F3398A9}"/>
               </a:ext>
             </a:extLst>
           </p:cNvPr>
@@ -10152,7 +10160,7 @@
           <p:cNvPr id="4" name="">
             <a:extLst xmlns:a="http://schemas.openxmlformats.org/drawingml/2006/main">
               <a:ext uri="{FF2B5EF4-FFF2-40B4-BE49-F238E27FC236}">
-                <a16:creationId xmlns:a16="http://schemas.microsoft.com/office/drawing/2014/main" id="{17202B47-149F-4664-B09D-CBB0CF9EB0FE}"/>
+                <a16:creationId xmlns:a16="http://schemas.microsoft.com/office/drawing/2014/main" id="{B7146656-D16D-4B50-A5B2-F2AD30B55D7A}"/>
               </a:ext>
             </a:extLst>
           </p:cNvPr>
@@ -10209,7 +10217,7 @@
           <p:cNvPr id="5" name="">
             <a:extLst xmlns:a="http://schemas.openxmlformats.org/drawingml/2006/main">
               <a:ext uri="{FF2B5EF4-FFF2-40B4-BE49-F238E27FC236}">
-                <a16:creationId xmlns:a16="http://schemas.microsoft.com/office/drawing/2014/main" id="{AFFF9B80-4C55-4854-9A28-677C081FF0F8}"/>
+                <a16:creationId xmlns:a16="http://schemas.microsoft.com/office/drawing/2014/main" id="{198A1FEB-85E0-41CB-8492-16B6C27691B3}"/>
               </a:ext>
             </a:extLst>
           </p:cNvPr>
@@ -10266,7 +10274,7 @@
           <p:cNvPr id="6" name="">
             <a:extLst xmlns:a="http://schemas.openxmlformats.org/drawingml/2006/main">
               <a:ext uri="{FF2B5EF4-FFF2-40B4-BE49-F238E27FC236}">
-                <a16:creationId xmlns:a16="http://schemas.microsoft.com/office/drawing/2014/main" id="{E992629A-D2D6-488F-9D46-926E541A44C5}"/>
+                <a16:creationId xmlns:a16="http://schemas.microsoft.com/office/drawing/2014/main" id="{A5B2B5E9-624C-485C-927C-618535E6B734}"/>
               </a:ext>
             </a:extLst>
           </p:cNvPr>
@@ -10323,7 +10331,7 @@
           <p:cNvPr id="7" name="">
             <a:extLst xmlns:a="http://schemas.openxmlformats.org/drawingml/2006/main">
               <a:ext uri="{FF2B5EF4-FFF2-40B4-BE49-F238E27FC236}">
-                <a16:creationId xmlns:a16="http://schemas.microsoft.com/office/drawing/2014/main" id="{4119E7C9-C042-425B-B8C1-ED52773A1CC0}"/>
+                <a16:creationId xmlns:a16="http://schemas.microsoft.com/office/drawing/2014/main" id="{2521EF3C-88ED-4107-83EA-8024FA8BD569}"/>
               </a:ext>
             </a:extLst>
           </p:cNvPr>
@@ -10355,7 +10363,7 @@
           <p:cNvPr id="8" name="">
             <a:extLst xmlns:a="http://schemas.openxmlformats.org/drawingml/2006/main">
               <a:ext uri="{FF2B5EF4-FFF2-40B4-BE49-F238E27FC236}">
-                <a16:creationId xmlns:a16="http://schemas.microsoft.com/office/drawing/2014/main" id="{A933DDD1-2BBF-4610-AA85-C8B893E25067}"/>
+                <a16:creationId xmlns:a16="http://schemas.microsoft.com/office/drawing/2014/main" id="{2A21C9F1-B6D0-4E3A-BFF8-AF300129F57A}"/>
               </a:ext>
             </a:extLst>
           </p:cNvPr>
@@ -10412,7 +10420,7 @@
           <p:cNvPr id="9" name="">
             <a:extLst xmlns:a="http://schemas.openxmlformats.org/drawingml/2006/main">
               <a:ext uri="{FF2B5EF4-FFF2-40B4-BE49-F238E27FC236}">
-                <a16:creationId xmlns:a16="http://schemas.microsoft.com/office/drawing/2014/main" id="{EE67D92E-21D1-4EC2-974C-2AD310AA5732}"/>
+                <a16:creationId xmlns:a16="http://schemas.microsoft.com/office/drawing/2014/main" id="{824C0834-6329-4B42-9D7F-BA01BD611365}"/>
               </a:ext>
             </a:extLst>
           </p:cNvPr>
@@ -10469,7 +10477,7 @@
           <p:cNvPr id="10" name="">
             <a:extLst xmlns:a="http://schemas.openxmlformats.org/drawingml/2006/main">
               <a:ext uri="{FF2B5EF4-FFF2-40B4-BE49-F238E27FC236}">
-                <a16:creationId xmlns:a16="http://schemas.microsoft.com/office/drawing/2014/main" id="{5438DB4B-980F-4252-B88E-60562CB0F455}"/>
+                <a16:creationId xmlns:a16="http://schemas.microsoft.com/office/drawing/2014/main" id="{EA412360-C4EF-41A2-AF2F-DD7C4AB53FEF}"/>
               </a:ext>
             </a:extLst>
           </p:cNvPr>
@@ -10526,7 +10534,7 @@
           <p:cNvPr id="11" name="">
             <a:extLst xmlns:a="http://schemas.openxmlformats.org/drawingml/2006/main">
               <a:ext uri="{FF2B5EF4-FFF2-40B4-BE49-F238E27FC236}">
-                <a16:creationId xmlns:a16="http://schemas.microsoft.com/office/drawing/2014/main" id="{6B26F12B-4B73-4271-927B-039DBC5D6D4D}"/>
+                <a16:creationId xmlns:a16="http://schemas.microsoft.com/office/drawing/2014/main" id="{49EB27FE-447E-4C10-9146-D677B43447D4}"/>
               </a:ext>
             </a:extLst>
           </p:cNvPr>
@@ -10583,7 +10591,7 @@
           <p:cNvPr id="12" name="">
             <a:extLst xmlns:a="http://schemas.openxmlformats.org/drawingml/2006/main">
               <a:ext uri="{FF2B5EF4-FFF2-40B4-BE49-F238E27FC236}">
-                <a16:creationId xmlns:a16="http://schemas.microsoft.com/office/drawing/2014/main" id="{9E0DAFFD-A42C-4CA0-A18B-1A4760A6F505}"/>
+                <a16:creationId xmlns:a16="http://schemas.microsoft.com/office/drawing/2014/main" id="{5FF4899A-7533-4F98-AB65-A13690D19BB1}"/>
               </a:ext>
             </a:extLst>
           </p:cNvPr>
@@ -10640,7 +10648,7 @@
           <p:cNvPr id="13" name="">
             <a:extLst xmlns:a="http://schemas.openxmlformats.org/drawingml/2006/main">
               <a:ext uri="{FF2B5EF4-FFF2-40B4-BE49-F238E27FC236}">
-                <a16:creationId xmlns:a16="http://schemas.microsoft.com/office/drawing/2014/main" id="{319BCD67-4540-44BA-9C1D-C46765B3B728}"/>
+                <a16:creationId xmlns:a16="http://schemas.microsoft.com/office/drawing/2014/main" id="{583D1CCE-9B4F-4127-A794-DE6F70B13EA1}"/>
               </a:ext>
             </a:extLst>
           </p:cNvPr>
@@ -10697,7 +10705,7 @@
           <p:cNvPr id="14" name="">
             <a:extLst xmlns:a="http://schemas.openxmlformats.org/drawingml/2006/main">
               <a:ext uri="{FF2B5EF4-FFF2-40B4-BE49-F238E27FC236}">
-                <a16:creationId xmlns:a16="http://schemas.microsoft.com/office/drawing/2014/main" id="{D0D67857-E08A-4868-BE4D-6ACC8F1F2EE4}"/>
+                <a16:creationId xmlns:a16="http://schemas.microsoft.com/office/drawing/2014/main" id="{4208ADE8-C3C4-4BFF-901D-6F613D9AE14B}"/>
               </a:ext>
             </a:extLst>
           </p:cNvPr>
@@ -10754,7 +10762,7 @@
           <p:cNvPr id="15" name="">
             <a:extLst xmlns:a="http://schemas.openxmlformats.org/drawingml/2006/main">
               <a:ext uri="{FF2B5EF4-FFF2-40B4-BE49-F238E27FC236}">
-                <a16:creationId xmlns:a16="http://schemas.microsoft.com/office/drawing/2014/main" id="{78DE6E4C-C758-467A-9811-346CFA10D756}"/>
+                <a16:creationId xmlns:a16="http://schemas.microsoft.com/office/drawing/2014/main" id="{9B58D871-9FD7-4658-BF9B-CC0F3AC08AFC}"/>
               </a:ext>
             </a:extLst>
           </p:cNvPr>
@@ -10809,7 +10817,7 @@
     </p:spTree>
     <p:extLst>
       <p:ext uri="{BB962C8B-B14F-4D97-AF65-F5344CB8AC3E}">
-        <p14:creationId xmlns:p14="http://schemas.microsoft.com/office/powerpoint/2010/main" val="621882646"/>
+        <p14:creationId xmlns:p14="http://schemas.microsoft.com/office/powerpoint/2010/main" val="550008540"/>
       </p:ext>
     </p:extLst>
   </p:cSld>
@@ -10964,7 +10972,7 @@
           <p:cNvPr id="16" name="">
             <a:extLst xmlns:a="http://schemas.openxmlformats.org/drawingml/2006/main">
               <a:ext uri="{FF2B5EF4-FFF2-40B4-BE49-F238E27FC236}">
-                <a16:creationId xmlns:a16="http://schemas.microsoft.com/office/drawing/2014/main" id="{85343EBE-5AA2-416D-AF29-1794AFB93AC1}"/>
+                <a16:creationId xmlns:a16="http://schemas.microsoft.com/office/drawing/2014/main" id="{8396B9FF-7762-412D-8600-775531A62F9E}"/>
               </a:ext>
             </a:extLst>
           </p:cNvPr>
@@ -10996,7 +11004,7 @@
           <p:cNvPr id="2" name="">
             <a:extLst xmlns:a="http://schemas.openxmlformats.org/drawingml/2006/main">
               <a:ext uri="{FF2B5EF4-FFF2-40B4-BE49-F238E27FC236}">
-                <a16:creationId xmlns:a16="http://schemas.microsoft.com/office/drawing/2014/main" id="{246ABF9F-BF8C-42C3-BA42-B185F108D908}"/>
+                <a16:creationId xmlns:a16="http://schemas.microsoft.com/office/drawing/2014/main" id="{A309A9A9-D4F9-4D4E-A191-CBE5DB6E9982}"/>
               </a:ext>
             </a:extLst>
           </p:cNvPr>
@@ -11053,7 +11061,7 @@
           <p:cNvPr id="3" name="">
             <a:extLst xmlns:a="http://schemas.openxmlformats.org/drawingml/2006/main">
               <a:ext uri="{FF2B5EF4-FFF2-40B4-BE49-F238E27FC236}">
-                <a16:creationId xmlns:a16="http://schemas.microsoft.com/office/drawing/2014/main" id="{4303A710-7EEB-4F7F-99DD-FC950DE40643}"/>
+                <a16:creationId xmlns:a16="http://schemas.microsoft.com/office/drawing/2014/main" id="{36E82208-59C9-402B-BDA3-49D4911B718F}"/>
               </a:ext>
             </a:extLst>
           </p:cNvPr>
@@ -11085,7 +11093,7 @@
           <p:cNvPr id="4" name="">
             <a:extLst xmlns:a="http://schemas.openxmlformats.org/drawingml/2006/main">
               <a:ext uri="{FF2B5EF4-FFF2-40B4-BE49-F238E27FC236}">
-                <a16:creationId xmlns:a16="http://schemas.microsoft.com/office/drawing/2014/main" id="{49ECCEA7-56AE-4AEE-A969-2F6DD4D2FF22}"/>
+                <a16:creationId xmlns:a16="http://schemas.microsoft.com/office/drawing/2014/main" id="{2102B276-A36E-4E26-94CE-24E50B595042}"/>
               </a:ext>
             </a:extLst>
           </p:cNvPr>
@@ -11142,7 +11150,7 @@
           <p:cNvPr id="5" name="">
             <a:extLst xmlns:a="http://schemas.openxmlformats.org/drawingml/2006/main">
               <a:ext uri="{FF2B5EF4-FFF2-40B4-BE49-F238E27FC236}">
-                <a16:creationId xmlns:a16="http://schemas.microsoft.com/office/drawing/2014/main" id="{EFDFF68A-6189-4ACE-B888-5FAEFF8A1017}"/>
+                <a16:creationId xmlns:a16="http://schemas.microsoft.com/office/drawing/2014/main" id="{1E23A6EA-A098-46FE-9A66-4EA2911CDC14}"/>
               </a:ext>
             </a:extLst>
           </p:cNvPr>
@@ -11199,7 +11207,7 @@
           <p:cNvPr id="6" name="">
             <a:extLst xmlns:a="http://schemas.openxmlformats.org/drawingml/2006/main">
               <a:ext uri="{FF2B5EF4-FFF2-40B4-BE49-F238E27FC236}">
-                <a16:creationId xmlns:a16="http://schemas.microsoft.com/office/drawing/2014/main" id="{ECE00137-C2D6-4902-9C7C-928BDE38D10C}"/>
+                <a16:creationId xmlns:a16="http://schemas.microsoft.com/office/drawing/2014/main" id="{15EB6AEE-679F-48C2-968E-7FEA0E9EAB90}"/>
               </a:ext>
             </a:extLst>
           </p:cNvPr>
@@ -11256,7 +11264,7 @@
           <p:cNvPr id="7" name="">
             <a:extLst xmlns:a="http://schemas.openxmlformats.org/drawingml/2006/main">
               <a:ext uri="{FF2B5EF4-FFF2-40B4-BE49-F238E27FC236}">
-                <a16:creationId xmlns:a16="http://schemas.microsoft.com/office/drawing/2014/main" id="{2971638F-AF80-4E6E-A0B4-2F8B964DD5F1}"/>
+                <a16:creationId xmlns:a16="http://schemas.microsoft.com/office/drawing/2014/main" id="{7BE4D93A-5EF0-4214-8A81-F6C2AB3FD37A}"/>
               </a:ext>
             </a:extLst>
           </p:cNvPr>
@@ -11288,7 +11296,7 @@
           <p:cNvPr id="8" name="">
             <a:extLst xmlns:a="http://schemas.openxmlformats.org/drawingml/2006/main">
               <a:ext uri="{FF2B5EF4-FFF2-40B4-BE49-F238E27FC236}">
-                <a16:creationId xmlns:a16="http://schemas.microsoft.com/office/drawing/2014/main" id="{64B2F2F9-A451-4B2E-8D8D-AC0F96C152AC}"/>
+                <a16:creationId xmlns:a16="http://schemas.microsoft.com/office/drawing/2014/main" id="{094A3370-1F71-443C-9BF3-5FF41E235028}"/>
               </a:ext>
             </a:extLst>
           </p:cNvPr>
@@ -11345,7 +11353,7 @@
           <p:cNvPr id="9" name="">
             <a:extLst xmlns:a="http://schemas.openxmlformats.org/drawingml/2006/main">
               <a:ext uri="{FF2B5EF4-FFF2-40B4-BE49-F238E27FC236}">
-                <a16:creationId xmlns:a16="http://schemas.microsoft.com/office/drawing/2014/main" id="{DE43C7FE-C8E3-46EF-8CCA-56C935FE3A4A}"/>
+                <a16:creationId xmlns:a16="http://schemas.microsoft.com/office/drawing/2014/main" id="{810A25A9-F995-4EB3-86C0-2A41DA0DAB50}"/>
               </a:ext>
             </a:extLst>
           </p:cNvPr>
@@ -11406,7 +11414,7 @@
           <p:nvPr/>
         </p:nvPicPr>
         <p:blipFill>
-          <a:blip xmlns:r="http://schemas.openxmlformats.org/officeDocument/2006/relationships" xmlns:a="http://schemas.openxmlformats.org/drawingml/2006/main" r:embed="R26b2219c8c124bf2"/>
+          <a:blip xmlns:r="http://schemas.openxmlformats.org/officeDocument/2006/relationships" xmlns:a="http://schemas.openxmlformats.org/drawingml/2006/main" r:embed="R0758060e15394c06"/>
           <a:stretch xmlns:a="http://schemas.openxmlformats.org/drawingml/2006/main"/>
         </p:blipFill>
         <p:spPr>
@@ -11424,7 +11432,7 @@
           <p:cNvPr id="11" name="">
             <a:extLst xmlns:a="http://schemas.openxmlformats.org/drawingml/2006/main">
               <a:ext uri="{FF2B5EF4-FFF2-40B4-BE49-F238E27FC236}">
-                <a16:creationId xmlns:a16="http://schemas.microsoft.com/office/drawing/2014/main" id="{6DFF322B-26C7-4931-82C4-8096521879EE}"/>
+                <a16:creationId xmlns:a16="http://schemas.microsoft.com/office/drawing/2014/main" id="{86BD4C89-5A29-49AB-9F43-D87E67461DF1}"/>
               </a:ext>
             </a:extLst>
           </p:cNvPr>
@@ -11481,7 +11489,7 @@
           <p:cNvPr id="12" name="">
             <a:extLst xmlns:a="http://schemas.openxmlformats.org/drawingml/2006/main">
               <a:ext uri="{FF2B5EF4-FFF2-40B4-BE49-F238E27FC236}">
-                <a16:creationId xmlns:a16="http://schemas.microsoft.com/office/drawing/2014/main" id="{A897E020-CEB0-40BF-B7FE-86A1EAB3826F}"/>
+                <a16:creationId xmlns:a16="http://schemas.microsoft.com/office/drawing/2014/main" id="{7A226AEB-14C2-47C8-BC62-B1BACA7A2FAE}"/>
               </a:ext>
             </a:extLst>
           </p:cNvPr>
@@ -11538,7 +11546,7 @@
           <p:cNvPr id="13" name="">
             <a:extLst xmlns:a="http://schemas.openxmlformats.org/drawingml/2006/main">
               <a:ext uri="{FF2B5EF4-FFF2-40B4-BE49-F238E27FC236}">
-                <a16:creationId xmlns:a16="http://schemas.microsoft.com/office/drawing/2014/main" id="{B622A2AE-F088-4FBC-BAAD-2D51EDA11499}"/>
+                <a16:creationId xmlns:a16="http://schemas.microsoft.com/office/drawing/2014/main" id="{C6238863-0D00-47DE-9246-327A55EB2B1B}"/>
               </a:ext>
             </a:extLst>
           </p:cNvPr>
@@ -11570,7 +11578,7 @@
           <p:cNvPr id="14" name="">
             <a:extLst xmlns:a="http://schemas.openxmlformats.org/drawingml/2006/main">
               <a:ext uri="{FF2B5EF4-FFF2-40B4-BE49-F238E27FC236}">
-                <a16:creationId xmlns:a16="http://schemas.microsoft.com/office/drawing/2014/main" id="{DD20E01A-0E42-4ED3-B845-F20AF7649299}"/>
+                <a16:creationId xmlns:a16="http://schemas.microsoft.com/office/drawing/2014/main" id="{EA375001-D16B-4C71-9EE3-2DB44282439A}"/>
               </a:ext>
             </a:extLst>
           </p:cNvPr>
@@ -11627,7 +11635,7 @@
           <p:cNvPr id="15" name="">
             <a:extLst xmlns:a="http://schemas.openxmlformats.org/drawingml/2006/main">
               <a:ext uri="{FF2B5EF4-FFF2-40B4-BE49-F238E27FC236}">
-                <a16:creationId xmlns:a16="http://schemas.microsoft.com/office/drawing/2014/main" id="{CB6F5CC7-CE1E-48EC-8E83-EDD072FA897C}"/>
+                <a16:creationId xmlns:a16="http://schemas.microsoft.com/office/drawing/2014/main" id="{8E05F765-A17C-40C8-9C5A-30BF10C3BCAE}"/>
               </a:ext>
             </a:extLst>
           </p:cNvPr>
@@ -11682,7 +11690,7 @@
     </p:spTree>
     <p:extLst>
       <p:ext uri="{BB962C8B-B14F-4D97-AF65-F5344CB8AC3E}">
-        <p14:creationId xmlns:p14="http://schemas.microsoft.com/office/powerpoint/2010/main" val="39234728"/>
+        <p14:creationId xmlns:p14="http://schemas.microsoft.com/office/powerpoint/2010/main" val="1325228336"/>
       </p:ext>
     </p:extLst>
   </p:cSld>
@@ -11837,7 +11845,7 @@
           <p:cNvPr id="23" name="">
             <a:extLst xmlns:a="http://schemas.openxmlformats.org/drawingml/2006/main">
               <a:ext uri="{FF2B5EF4-FFF2-40B4-BE49-F238E27FC236}">
-                <a16:creationId xmlns:a16="http://schemas.microsoft.com/office/drawing/2014/main" id="{0DC9132E-CAE7-4394-8ACD-1459EEF74B67}"/>
+                <a16:creationId xmlns:a16="http://schemas.microsoft.com/office/drawing/2014/main" id="{70505CE7-0760-4183-B773-6E7362259FCA}"/>
               </a:ext>
             </a:extLst>
           </p:cNvPr>
@@ -11869,7 +11877,7 @@
           <p:cNvPr id="2" name="">
             <a:extLst xmlns:a="http://schemas.openxmlformats.org/drawingml/2006/main">
               <a:ext uri="{FF2B5EF4-FFF2-40B4-BE49-F238E27FC236}">
-                <a16:creationId xmlns:a16="http://schemas.microsoft.com/office/drawing/2014/main" id="{550830A4-C7C5-4667-8907-ADF8D5B72BA1}"/>
+                <a16:creationId xmlns:a16="http://schemas.microsoft.com/office/drawing/2014/main" id="{FF7C4D82-10EE-421E-88D1-B9E616E356D2}"/>
               </a:ext>
             </a:extLst>
           </p:cNvPr>
@@ -11926,7 +11934,7 @@
           <p:cNvPr id="3" name="">
             <a:extLst xmlns:a="http://schemas.openxmlformats.org/drawingml/2006/main">
               <a:ext uri="{FF2B5EF4-FFF2-40B4-BE49-F238E27FC236}">
-                <a16:creationId xmlns:a16="http://schemas.microsoft.com/office/drawing/2014/main" id="{DB066978-08E3-4492-825C-29D902343F9F}"/>
+                <a16:creationId xmlns:a16="http://schemas.microsoft.com/office/drawing/2014/main" id="{7379B887-83DF-4C01-952D-FBBFDD1B64BC}"/>
               </a:ext>
             </a:extLst>
           </p:cNvPr>
@@ -11958,7 +11966,7 @@
           <p:cNvPr id="4" name="">
             <a:extLst xmlns:a="http://schemas.openxmlformats.org/drawingml/2006/main">
               <a:ext uri="{FF2B5EF4-FFF2-40B4-BE49-F238E27FC236}">
-                <a16:creationId xmlns:a16="http://schemas.microsoft.com/office/drawing/2014/main" id="{A406CB9C-1CAF-49C1-B113-6568520C911C}"/>
+                <a16:creationId xmlns:a16="http://schemas.microsoft.com/office/drawing/2014/main" id="{ABEDD1C2-D8F6-43BB-8449-4616DBE8E9A4}"/>
               </a:ext>
             </a:extLst>
           </p:cNvPr>
@@ -12015,7 +12023,7 @@
           <p:cNvPr id="5" name="">
             <a:extLst xmlns:a="http://schemas.openxmlformats.org/drawingml/2006/main">
               <a:ext uri="{FF2B5EF4-FFF2-40B4-BE49-F238E27FC236}">
-                <a16:creationId xmlns:a16="http://schemas.microsoft.com/office/drawing/2014/main" id="{605AE7A3-ABEA-4B5C-B9C1-FEA4A1C63C4B}"/>
+                <a16:creationId xmlns:a16="http://schemas.microsoft.com/office/drawing/2014/main" id="{A733C757-CE24-4566-A5C7-96A7888B642C}"/>
               </a:ext>
             </a:extLst>
           </p:cNvPr>
@@ -12072,7 +12080,7 @@
           <p:cNvPr id="6" name="">
             <a:extLst xmlns:a="http://schemas.openxmlformats.org/drawingml/2006/main">
               <a:ext uri="{FF2B5EF4-FFF2-40B4-BE49-F238E27FC236}">
-                <a16:creationId xmlns:a16="http://schemas.microsoft.com/office/drawing/2014/main" id="{2E1EEEC5-12BB-400C-993A-C844FC81554F}"/>
+                <a16:creationId xmlns:a16="http://schemas.microsoft.com/office/drawing/2014/main" id="{75D80596-8D7F-4E83-AA65-F0A41DA7A33E}"/>
               </a:ext>
             </a:extLst>
           </p:cNvPr>
@@ -12129,7 +12137,7 @@
           <p:cNvPr id="7" name="">
             <a:extLst xmlns:a="http://schemas.openxmlformats.org/drawingml/2006/main">
               <a:ext uri="{FF2B5EF4-FFF2-40B4-BE49-F238E27FC236}">
-                <a16:creationId xmlns:a16="http://schemas.microsoft.com/office/drawing/2014/main" id="{E40B3ABE-D783-4EC8-973D-36976783C1EF}"/>
+                <a16:creationId xmlns:a16="http://schemas.microsoft.com/office/drawing/2014/main" id="{1771705B-3B55-4BF6-A316-F109FA885C47}"/>
               </a:ext>
             </a:extLst>
           </p:cNvPr>
@@ -12161,7 +12169,7 @@
           <p:cNvPr id="8" name="">
             <a:extLst xmlns:a="http://schemas.openxmlformats.org/drawingml/2006/main">
               <a:ext uri="{FF2B5EF4-FFF2-40B4-BE49-F238E27FC236}">
-                <a16:creationId xmlns:a16="http://schemas.microsoft.com/office/drawing/2014/main" id="{81D581DA-75D4-4BA6-A12E-37636E9CAF59}"/>
+                <a16:creationId xmlns:a16="http://schemas.microsoft.com/office/drawing/2014/main" id="{E6FFA12B-AA54-4A4B-9480-F57E5D847354}"/>
               </a:ext>
             </a:extLst>
           </p:cNvPr>
@@ -12218,7 +12226,7 @@
           <p:cNvPr id="9" name="">
             <a:extLst xmlns:a="http://schemas.openxmlformats.org/drawingml/2006/main">
               <a:ext uri="{FF2B5EF4-FFF2-40B4-BE49-F238E27FC236}">
-                <a16:creationId xmlns:a16="http://schemas.microsoft.com/office/drawing/2014/main" id="{0912A748-7050-4D4D-B524-65CD2ED592FB}"/>
+                <a16:creationId xmlns:a16="http://schemas.microsoft.com/office/drawing/2014/main" id="{D78E3920-4C6F-42C3-AB93-E9408F56C699}"/>
               </a:ext>
             </a:extLst>
           </p:cNvPr>
@@ -12275,7 +12283,7 @@
           <p:cNvPr id="10" name="">
             <a:extLst xmlns:a="http://schemas.openxmlformats.org/drawingml/2006/main">
               <a:ext uri="{FF2B5EF4-FFF2-40B4-BE49-F238E27FC236}">
-                <a16:creationId xmlns:a16="http://schemas.microsoft.com/office/drawing/2014/main" id="{9BB8E23E-ECEB-4181-ADB6-E4DCC2284890}"/>
+                <a16:creationId xmlns:a16="http://schemas.microsoft.com/office/drawing/2014/main" id="{1A168DF7-6BF8-4723-A88D-F59414FF5AA1}"/>
               </a:ext>
             </a:extLst>
           </p:cNvPr>
@@ -12309,7 +12317,7 @@
           <p:cNvPr id="11" name="">
             <a:extLst xmlns:a="http://schemas.openxmlformats.org/drawingml/2006/main">
               <a:ext uri="{FF2B5EF4-FFF2-40B4-BE49-F238E27FC236}">
-                <a16:creationId xmlns:a16="http://schemas.microsoft.com/office/drawing/2014/main" id="{B0B05E12-FDB1-4419-9AD8-C3B34708DA89}"/>
+                <a16:creationId xmlns:a16="http://schemas.microsoft.com/office/drawing/2014/main" id="{DD1817C8-24B2-4093-9F98-0498F9F37FD1}"/>
               </a:ext>
             </a:extLst>
           </p:cNvPr>
@@ -12341,7 +12349,7 @@
           <p:cNvPr id="12" name="">
             <a:extLst xmlns:a="http://schemas.openxmlformats.org/drawingml/2006/main">
               <a:ext uri="{FF2B5EF4-FFF2-40B4-BE49-F238E27FC236}">
-                <a16:creationId xmlns:a16="http://schemas.microsoft.com/office/drawing/2014/main" id="{89F1E329-ED18-4C1C-831D-276F6469FE13}"/>
+                <a16:creationId xmlns:a16="http://schemas.microsoft.com/office/drawing/2014/main" id="{29C21596-78FE-4F43-B7A7-847EE2E033AB}"/>
               </a:ext>
             </a:extLst>
           </p:cNvPr>
@@ -12398,7 +12406,7 @@
           <p:cNvPr id="13" name="">
             <a:extLst xmlns:a="http://schemas.openxmlformats.org/drawingml/2006/main">
               <a:ext uri="{FF2B5EF4-FFF2-40B4-BE49-F238E27FC236}">
-                <a16:creationId xmlns:a16="http://schemas.microsoft.com/office/drawing/2014/main" id="{662A2637-CDC1-4A4C-92A7-78E2EC71A354}"/>
+                <a16:creationId xmlns:a16="http://schemas.microsoft.com/office/drawing/2014/main" id="{A5D14222-EBEE-4610-945E-FB5BF6BBA891}"/>
               </a:ext>
             </a:extLst>
           </p:cNvPr>
@@ -12455,7 +12463,7 @@
           <p:cNvPr id="14" name="">
             <a:extLst xmlns:a="http://schemas.openxmlformats.org/drawingml/2006/main">
               <a:ext uri="{FF2B5EF4-FFF2-40B4-BE49-F238E27FC236}">
-                <a16:creationId xmlns:a16="http://schemas.microsoft.com/office/drawing/2014/main" id="{7C66CFB8-FE02-4224-A3AF-A60E73D5A8F1}"/>
+                <a16:creationId xmlns:a16="http://schemas.microsoft.com/office/drawing/2014/main" id="{02CDE628-673B-4E95-BC25-43B83C1339A4}"/>
               </a:ext>
             </a:extLst>
           </p:cNvPr>
@@ -12489,7 +12497,7 @@
           <p:cNvPr id="15" name="">
             <a:extLst xmlns:a="http://schemas.openxmlformats.org/drawingml/2006/main">
               <a:ext uri="{FF2B5EF4-FFF2-40B4-BE49-F238E27FC236}">
-                <a16:creationId xmlns:a16="http://schemas.microsoft.com/office/drawing/2014/main" id="{83A30F31-EEE4-4C35-B090-98E0A185248D}"/>
+                <a16:creationId xmlns:a16="http://schemas.microsoft.com/office/drawing/2014/main" id="{B0DB2F0A-C374-4BBB-9C08-2DFE60A38E57}"/>
               </a:ext>
             </a:extLst>
           </p:cNvPr>
@@ -12521,7 +12529,7 @@
           <p:cNvPr id="16" name="">
             <a:extLst xmlns:a="http://schemas.openxmlformats.org/drawingml/2006/main">
               <a:ext uri="{FF2B5EF4-FFF2-40B4-BE49-F238E27FC236}">
-                <a16:creationId xmlns:a16="http://schemas.microsoft.com/office/drawing/2014/main" id="{DB4B7136-36BF-4369-8F30-B13DE83C7882}"/>
+                <a16:creationId xmlns:a16="http://schemas.microsoft.com/office/drawing/2014/main" id="{F79ADB20-BB33-42E9-AFC8-55E4D5BAFE04}"/>
               </a:ext>
             </a:extLst>
           </p:cNvPr>
@@ -12578,7 +12586,7 @@
           <p:cNvPr id="17" name="">
             <a:extLst xmlns:a="http://schemas.openxmlformats.org/drawingml/2006/main">
               <a:ext uri="{FF2B5EF4-FFF2-40B4-BE49-F238E27FC236}">
-                <a16:creationId xmlns:a16="http://schemas.microsoft.com/office/drawing/2014/main" id="{68FAC666-CB7B-4C4F-ACD9-0CDA8CE9F85E}"/>
+                <a16:creationId xmlns:a16="http://schemas.microsoft.com/office/drawing/2014/main" id="{B740D6C1-7375-49D3-BDA3-5CE359898635}"/>
               </a:ext>
             </a:extLst>
           </p:cNvPr>
@@ -12635,7 +12643,7 @@
           <p:cNvPr id="18" name="">
             <a:extLst xmlns:a="http://schemas.openxmlformats.org/drawingml/2006/main">
               <a:ext uri="{FF2B5EF4-FFF2-40B4-BE49-F238E27FC236}">
-                <a16:creationId xmlns:a16="http://schemas.microsoft.com/office/drawing/2014/main" id="{FD64D0C6-CC09-4DD6-9A8E-8DDF3DFCA464}"/>
+                <a16:creationId xmlns:a16="http://schemas.microsoft.com/office/drawing/2014/main" id="{150EF4F1-94F4-4953-82E9-F8B4081C784E}"/>
               </a:ext>
             </a:extLst>
           </p:cNvPr>
@@ -12669,7 +12677,7 @@
           <p:cNvPr id="19" name="">
             <a:extLst xmlns:a="http://schemas.openxmlformats.org/drawingml/2006/main">
               <a:ext uri="{FF2B5EF4-FFF2-40B4-BE49-F238E27FC236}">
-                <a16:creationId xmlns:a16="http://schemas.microsoft.com/office/drawing/2014/main" id="{86CB9E1C-C7D5-4DE3-8D61-08529863A07D}"/>
+                <a16:creationId xmlns:a16="http://schemas.microsoft.com/office/drawing/2014/main" id="{AB690AB0-252B-47A2-A2FC-20B9556B9C7F}"/>
               </a:ext>
             </a:extLst>
           </p:cNvPr>
@@ -12701,7 +12709,7 @@
           <p:cNvPr id="20" name="">
             <a:extLst xmlns:a="http://schemas.openxmlformats.org/drawingml/2006/main">
               <a:ext uri="{FF2B5EF4-FFF2-40B4-BE49-F238E27FC236}">
-                <a16:creationId xmlns:a16="http://schemas.microsoft.com/office/drawing/2014/main" id="{FE90CDBE-26EE-41D2-9961-63F4A9925973}"/>
+                <a16:creationId xmlns:a16="http://schemas.microsoft.com/office/drawing/2014/main" id="{18ACF818-4875-42F7-B5C7-0B8F186CB670}"/>
               </a:ext>
             </a:extLst>
           </p:cNvPr>
@@ -12758,7 +12766,7 @@
           <p:cNvPr id="21" name="">
             <a:extLst xmlns:a="http://schemas.openxmlformats.org/drawingml/2006/main">
               <a:ext uri="{FF2B5EF4-FFF2-40B4-BE49-F238E27FC236}">
-                <a16:creationId xmlns:a16="http://schemas.microsoft.com/office/drawing/2014/main" id="{00F9E73E-5FCA-4C6F-BB3B-6B3CEE43FEAD}"/>
+                <a16:creationId xmlns:a16="http://schemas.microsoft.com/office/drawing/2014/main" id="{94A6EAC7-44EB-49C9-BD26-49032F6E5013}"/>
               </a:ext>
             </a:extLst>
           </p:cNvPr>
@@ -12815,7 +12823,7 @@
           <p:cNvPr id="22" name="">
             <a:extLst xmlns:a="http://schemas.openxmlformats.org/drawingml/2006/main">
               <a:ext uri="{FF2B5EF4-FFF2-40B4-BE49-F238E27FC236}">
-                <a16:creationId xmlns:a16="http://schemas.microsoft.com/office/drawing/2014/main" id="{54B8C3AF-C9E1-4524-A56F-A2619C84F601}"/>
+                <a16:creationId xmlns:a16="http://schemas.microsoft.com/office/drawing/2014/main" id="{133EDBE9-D166-498C-B216-985CCA5CC125}"/>
               </a:ext>
             </a:extLst>
           </p:cNvPr>
@@ -12870,7 +12878,7 @@
     </p:spTree>
     <p:extLst>
       <p:ext uri="{BB962C8B-B14F-4D97-AF65-F5344CB8AC3E}">
-        <p14:creationId xmlns:p14="http://schemas.microsoft.com/office/powerpoint/2010/main" val="204396915"/>
+        <p14:creationId xmlns:p14="http://schemas.microsoft.com/office/powerpoint/2010/main" val="941722662"/>
       </p:ext>
     </p:extLst>
   </p:cSld>
@@ -13071,7 +13079,7 @@
           <p:cNvPr id="22" name="">
             <a:extLst xmlns:a="http://schemas.openxmlformats.org/drawingml/2006/main">
               <a:ext uri="{FF2B5EF4-FFF2-40B4-BE49-F238E27FC236}">
-                <a16:creationId xmlns:a16="http://schemas.microsoft.com/office/drawing/2014/main" id="{893E8E1D-99AE-4AE3-8082-798AA0AA1CEC}"/>
+                <a16:creationId xmlns:a16="http://schemas.microsoft.com/office/drawing/2014/main" id="{A9CD164E-45E7-4115-9A89-9F8596D4524F}"/>
               </a:ext>
             </a:extLst>
           </p:cNvPr>
@@ -13103,7 +13111,7 @@
           <p:cNvPr id="2" name="">
             <a:extLst xmlns:a="http://schemas.openxmlformats.org/drawingml/2006/main">
               <a:ext uri="{FF2B5EF4-FFF2-40B4-BE49-F238E27FC236}">
-                <a16:creationId xmlns:a16="http://schemas.microsoft.com/office/drawing/2014/main" id="{EB09314C-4EEC-470B-B6A1-A1826953B3B3}"/>
+                <a16:creationId xmlns:a16="http://schemas.microsoft.com/office/drawing/2014/main" id="{3C5E6050-D17E-45E8-BD24-2DB3B96A6D11}"/>
               </a:ext>
             </a:extLst>
           </p:cNvPr>
@@ -13160,7 +13168,7 @@
           <p:cNvPr id="3" name="">
             <a:extLst xmlns:a="http://schemas.openxmlformats.org/drawingml/2006/main">
               <a:ext uri="{FF2B5EF4-FFF2-40B4-BE49-F238E27FC236}">
-                <a16:creationId xmlns:a16="http://schemas.microsoft.com/office/drawing/2014/main" id="{1C2640DF-A49A-4F42-A9C9-0A8A4357E95C}"/>
+                <a16:creationId xmlns:a16="http://schemas.microsoft.com/office/drawing/2014/main" id="{C97E94DB-E4F2-4999-9F7A-0D65375C951F}"/>
               </a:ext>
             </a:extLst>
           </p:cNvPr>
@@ -13192,7 +13200,7 @@
           <p:cNvPr id="4" name="">
             <a:extLst xmlns:a="http://schemas.openxmlformats.org/drawingml/2006/main">
               <a:ext uri="{FF2B5EF4-FFF2-40B4-BE49-F238E27FC236}">
-                <a16:creationId xmlns:a16="http://schemas.microsoft.com/office/drawing/2014/main" id="{3F3ACAD3-57A0-4726-8C66-6182070EC7CE}"/>
+                <a16:creationId xmlns:a16="http://schemas.microsoft.com/office/drawing/2014/main" id="{C933DF66-94B9-4434-9AB1-51C0B71F145A}"/>
               </a:ext>
             </a:extLst>
           </p:cNvPr>
@@ -13249,7 +13257,7 @@
           <p:cNvPr id="5" name="">
             <a:extLst xmlns:a="http://schemas.openxmlformats.org/drawingml/2006/main">
               <a:ext uri="{FF2B5EF4-FFF2-40B4-BE49-F238E27FC236}">
-                <a16:creationId xmlns:a16="http://schemas.microsoft.com/office/drawing/2014/main" id="{5E06096E-6105-4809-B089-0933B6EE7194}"/>
+                <a16:creationId xmlns:a16="http://schemas.microsoft.com/office/drawing/2014/main" id="{125A010F-9FB3-45E2-9F1E-150F0BE28E2C}"/>
               </a:ext>
             </a:extLst>
           </p:cNvPr>
@@ -13306,7 +13314,7 @@
           <p:cNvPr id="6" name="">
             <a:extLst xmlns:a="http://schemas.openxmlformats.org/drawingml/2006/main">
               <a:ext uri="{FF2B5EF4-FFF2-40B4-BE49-F238E27FC236}">
-                <a16:creationId xmlns:a16="http://schemas.microsoft.com/office/drawing/2014/main" id="{5B5E6098-4751-424A-9242-67745C7D7CA3}"/>
+                <a16:creationId xmlns:a16="http://schemas.microsoft.com/office/drawing/2014/main" id="{974BBD29-6952-4EAC-BA43-1EDF5DC5726E}"/>
               </a:ext>
             </a:extLst>
           </p:cNvPr>
@@ -13363,7 +13371,7 @@
           <p:cNvPr id="7" name="">
             <a:extLst xmlns:a="http://schemas.openxmlformats.org/drawingml/2006/main">
               <a:ext uri="{FF2B5EF4-FFF2-40B4-BE49-F238E27FC236}">
-                <a16:creationId xmlns:a16="http://schemas.microsoft.com/office/drawing/2014/main" id="{5BA3D873-B054-4CCF-AC5E-F8A628F13245}"/>
+                <a16:creationId xmlns:a16="http://schemas.microsoft.com/office/drawing/2014/main" id="{6E565681-4472-47E5-974A-11BEA7F6FFE5}"/>
               </a:ext>
             </a:extLst>
           </p:cNvPr>
@@ -13395,7 +13403,7 @@
           <p:cNvPr id="8" name="">
             <a:extLst xmlns:a="http://schemas.openxmlformats.org/drawingml/2006/main">
               <a:ext uri="{FF2B5EF4-FFF2-40B4-BE49-F238E27FC236}">
-                <a16:creationId xmlns:a16="http://schemas.microsoft.com/office/drawing/2014/main" id="{36702353-9B68-428D-8905-D603BE8537BB}"/>
+                <a16:creationId xmlns:a16="http://schemas.microsoft.com/office/drawing/2014/main" id="{7C182B3D-4F95-42AF-88C5-904C258599B6}"/>
               </a:ext>
             </a:extLst>
           </p:cNvPr>
@@ -13452,7 +13460,7 @@
           <p:cNvPr id="9" name="">
             <a:extLst xmlns:a="http://schemas.openxmlformats.org/drawingml/2006/main">
               <a:ext uri="{FF2B5EF4-FFF2-40B4-BE49-F238E27FC236}">
-                <a16:creationId xmlns:a16="http://schemas.microsoft.com/office/drawing/2014/main" id="{C9298566-E2F9-40E4-AD06-C69A5E86D629}"/>
+                <a16:creationId xmlns:a16="http://schemas.microsoft.com/office/drawing/2014/main" id="{3322F136-A215-430B-B1AA-322154F1F243}"/>
               </a:ext>
             </a:extLst>
           </p:cNvPr>
@@ -13509,7 +13517,7 @@
           <p:cNvPr id="10" name="">
             <a:extLst xmlns:a="http://schemas.openxmlformats.org/drawingml/2006/main">
               <a:ext uri="{FF2B5EF4-FFF2-40B4-BE49-F238E27FC236}">
-                <a16:creationId xmlns:a16="http://schemas.microsoft.com/office/drawing/2014/main" id="{77C0D1C3-846C-4097-8CD2-B5E11CEBAB38}"/>
+                <a16:creationId xmlns:a16="http://schemas.microsoft.com/office/drawing/2014/main" id="{4D547FD2-A40F-490B-9BA4-3D3DB3D36C5A}"/>
               </a:ext>
             </a:extLst>
           </p:cNvPr>
@@ -13543,7 +13551,7 @@
           <p:cNvPr id="11" name="">
             <a:extLst xmlns:a="http://schemas.openxmlformats.org/drawingml/2006/main">
               <a:ext uri="{FF2B5EF4-FFF2-40B4-BE49-F238E27FC236}">
-                <a16:creationId xmlns:a16="http://schemas.microsoft.com/office/drawing/2014/main" id="{9C328C7F-24C9-42E2-988D-C836C4180F1E}"/>
+                <a16:creationId xmlns:a16="http://schemas.microsoft.com/office/drawing/2014/main" id="{CAB7DBC4-76A0-4657-BBEC-8A420AE7ABE8}"/>
               </a:ext>
             </a:extLst>
           </p:cNvPr>
@@ -13575,7 +13583,7 @@
           <p:cNvPr id="12" name="">
             <a:extLst xmlns:a="http://schemas.openxmlformats.org/drawingml/2006/main">
               <a:ext uri="{FF2B5EF4-FFF2-40B4-BE49-F238E27FC236}">
-                <a16:creationId xmlns:a16="http://schemas.microsoft.com/office/drawing/2014/main" id="{A21DAA90-B652-427C-890F-701126D7BDD7}"/>
+                <a16:creationId xmlns:a16="http://schemas.microsoft.com/office/drawing/2014/main" id="{668BEC32-0BEB-4B0D-A182-7E098C728D6F}"/>
               </a:ext>
             </a:extLst>
           </p:cNvPr>
@@ -13632,7 +13640,7 @@
           <p:cNvPr id="13" name="">
             <a:extLst xmlns:a="http://schemas.openxmlformats.org/drawingml/2006/main">
               <a:ext uri="{FF2B5EF4-FFF2-40B4-BE49-F238E27FC236}">
-                <a16:creationId xmlns:a16="http://schemas.microsoft.com/office/drawing/2014/main" id="{6A07D3E5-471C-40E4-BC0C-61BF607705FB}"/>
+                <a16:creationId xmlns:a16="http://schemas.microsoft.com/office/drawing/2014/main" id="{86F7B863-C314-4924-B567-6CA2E6F37EED}"/>
               </a:ext>
             </a:extLst>
           </p:cNvPr>
@@ -13689,7 +13697,7 @@
           <p:cNvPr id="14" name="">
             <a:extLst xmlns:a="http://schemas.openxmlformats.org/drawingml/2006/main">
               <a:ext uri="{FF2B5EF4-FFF2-40B4-BE49-F238E27FC236}">
-                <a16:creationId xmlns:a16="http://schemas.microsoft.com/office/drawing/2014/main" id="{74B59EE0-94AD-43B4-83BA-AD35F4B98FF9}"/>
+                <a16:creationId xmlns:a16="http://schemas.microsoft.com/office/drawing/2014/main" id="{CFA16CD6-DA75-4AFD-B824-1D2575D1E3B3}"/>
               </a:ext>
             </a:extLst>
           </p:cNvPr>
@@ -13723,7 +13731,7 @@
           <p:cNvPr id="15" name="">
             <a:extLst xmlns:a="http://schemas.openxmlformats.org/drawingml/2006/main">
               <a:ext uri="{FF2B5EF4-FFF2-40B4-BE49-F238E27FC236}">
-                <a16:creationId xmlns:a16="http://schemas.microsoft.com/office/drawing/2014/main" id="{BF661EC4-0ABE-478F-B5E8-A18A8918F4A0}"/>
+                <a16:creationId xmlns:a16="http://schemas.microsoft.com/office/drawing/2014/main" id="{11BAE36E-D611-43A3-AC05-77EA1093961E}"/>
               </a:ext>
             </a:extLst>
           </p:cNvPr>
@@ -13755,7 +13763,7 @@
           <p:cNvPr id="16" name="">
             <a:extLst xmlns:a="http://schemas.openxmlformats.org/drawingml/2006/main">
               <a:ext uri="{FF2B5EF4-FFF2-40B4-BE49-F238E27FC236}">
-                <a16:creationId xmlns:a16="http://schemas.microsoft.com/office/drawing/2014/main" id="{297DB43E-9F17-4592-BACC-01967363DCE4}"/>
+                <a16:creationId xmlns:a16="http://schemas.microsoft.com/office/drawing/2014/main" id="{C77E7DB4-6771-4175-9504-F7DD0FE156D2}"/>
               </a:ext>
             </a:extLst>
           </p:cNvPr>
@@ -13812,7 +13820,7 @@
           <p:cNvPr id="17" name="">
             <a:extLst xmlns:a="http://schemas.openxmlformats.org/drawingml/2006/main">
               <a:ext uri="{FF2B5EF4-FFF2-40B4-BE49-F238E27FC236}">
-                <a16:creationId xmlns:a16="http://schemas.microsoft.com/office/drawing/2014/main" id="{F1CC44C3-02D2-4170-9194-BE96B6FE77CA}"/>
+                <a16:creationId xmlns:a16="http://schemas.microsoft.com/office/drawing/2014/main" id="{0FC939FC-30F2-4005-B1B6-8DD21E3755C9}"/>
               </a:ext>
             </a:extLst>
           </p:cNvPr>
@@ -13869,7 +13877,7 @@
           <p:cNvPr id="18" name="">
             <a:extLst xmlns:a="http://schemas.openxmlformats.org/drawingml/2006/main">
               <a:ext uri="{FF2B5EF4-FFF2-40B4-BE49-F238E27FC236}">
-                <a16:creationId xmlns:a16="http://schemas.microsoft.com/office/drawing/2014/main" id="{F571C9E4-B08A-4A95-9F79-3A452BE7346B}"/>
+                <a16:creationId xmlns:a16="http://schemas.microsoft.com/office/drawing/2014/main" id="{40ACEEF3-C55B-4F69-8788-6676139EA814}"/>
               </a:ext>
             </a:extLst>
           </p:cNvPr>
@@ -13903,7 +13911,7 @@
           <p:cNvPr id="19" name="">
             <a:extLst xmlns:a="http://schemas.openxmlformats.org/drawingml/2006/main">
               <a:ext uri="{FF2B5EF4-FFF2-40B4-BE49-F238E27FC236}">
-                <a16:creationId xmlns:a16="http://schemas.microsoft.com/office/drawing/2014/main" id="{4BBC4348-A2C0-49F0-854D-A465AB373A4E}"/>
+                <a16:creationId xmlns:a16="http://schemas.microsoft.com/office/drawing/2014/main" id="{617D2E41-C06C-428C-AAD0-9827293385C0}"/>
               </a:ext>
             </a:extLst>
           </p:cNvPr>
@@ -13935,7 +13943,7 @@
           <p:cNvPr id="20" name="">
             <a:extLst xmlns:a="http://schemas.openxmlformats.org/drawingml/2006/main">
               <a:ext uri="{FF2B5EF4-FFF2-40B4-BE49-F238E27FC236}">
-                <a16:creationId xmlns:a16="http://schemas.microsoft.com/office/drawing/2014/main" id="{53C8C916-B4FC-472D-AF42-5D7D736005A5}"/>
+                <a16:creationId xmlns:a16="http://schemas.microsoft.com/office/drawing/2014/main" id="{F1B1C97D-A740-404A-AE93-42782AF1F6B6}"/>
               </a:ext>
             </a:extLst>
           </p:cNvPr>
@@ -13992,7 +14000,7 @@
           <p:cNvPr id="21" name="">
             <a:extLst xmlns:a="http://schemas.openxmlformats.org/drawingml/2006/main">
               <a:ext uri="{FF2B5EF4-FFF2-40B4-BE49-F238E27FC236}">
-                <a16:creationId xmlns:a16="http://schemas.microsoft.com/office/drawing/2014/main" id="{870012B6-14E0-46C5-8C84-E865BA0C47BA}"/>
+                <a16:creationId xmlns:a16="http://schemas.microsoft.com/office/drawing/2014/main" id="{900E5BFC-AD29-4801-83AF-5392F5C31A7C}"/>
               </a:ext>
             </a:extLst>
           </p:cNvPr>
@@ -14047,7 +14055,7 @@
     </p:spTree>
     <p:extLst>
       <p:ext uri="{BB962C8B-B14F-4D97-AF65-F5344CB8AC3E}">
-        <p14:creationId xmlns:p14="http://schemas.microsoft.com/office/powerpoint/2010/main" val="1220714687"/>
+        <p14:creationId xmlns:p14="http://schemas.microsoft.com/office/powerpoint/2010/main" val="1493854962"/>
       </p:ext>
     </p:extLst>
   </p:cSld>
